--- a/Analytics/00-3 А:Б тесты - теория/Presentation/00-3 A:B test.pptx
+++ b/Analytics/00-3 А:Б тесты - теория/Presentation/00-3 A:B test.pptx
@@ -5,7 +5,7 @@
     <p:sldMasterId id="2147483648" r:id="rId1"/>
   </p:sldMasterIdLst>
   <p:notesMasterIdLst>
-    <p:notesMasterId r:id="rId44"/>
+    <p:notesMasterId r:id="rId43"/>
   </p:notesMasterIdLst>
   <p:sldIdLst>
     <p:sldId id="256" r:id="rId2"/>
@@ -18,38 +18,37 @@
     <p:sldId id="393" r:id="rId9"/>
     <p:sldId id="342" r:id="rId10"/>
     <p:sldId id="394" r:id="rId11"/>
-    <p:sldId id="485" r:id="rId12"/>
-    <p:sldId id="486" r:id="rId13"/>
-    <p:sldId id="495" r:id="rId14"/>
-    <p:sldId id="411" r:id="rId15"/>
-    <p:sldId id="413" r:id="rId16"/>
-    <p:sldId id="487" r:id="rId17"/>
-    <p:sldId id="488" r:id="rId18"/>
-    <p:sldId id="489" r:id="rId19"/>
-    <p:sldId id="490" r:id="rId20"/>
-    <p:sldId id="491" r:id="rId21"/>
-    <p:sldId id="492" r:id="rId22"/>
-    <p:sldId id="493" r:id="rId23"/>
-    <p:sldId id="494" r:id="rId24"/>
-    <p:sldId id="501" r:id="rId25"/>
-    <p:sldId id="496" r:id="rId26"/>
-    <p:sldId id="497" r:id="rId27"/>
-    <p:sldId id="498" r:id="rId28"/>
-    <p:sldId id="499" r:id="rId29"/>
-    <p:sldId id="500" r:id="rId30"/>
-    <p:sldId id="502" r:id="rId31"/>
-    <p:sldId id="503" r:id="rId32"/>
-    <p:sldId id="504" r:id="rId33"/>
-    <p:sldId id="505" r:id="rId34"/>
-    <p:sldId id="391" r:id="rId35"/>
-    <p:sldId id="300" r:id="rId36"/>
-    <p:sldId id="484" r:id="rId37"/>
-    <p:sldId id="364" r:id="rId38"/>
-    <p:sldId id="281" r:id="rId39"/>
-    <p:sldId id="377" r:id="rId40"/>
-    <p:sldId id="301" r:id="rId41"/>
-    <p:sldId id="302" r:id="rId42"/>
-    <p:sldId id="335" r:id="rId43"/>
+    <p:sldId id="486" r:id="rId12"/>
+    <p:sldId id="495" r:id="rId13"/>
+    <p:sldId id="411" r:id="rId14"/>
+    <p:sldId id="413" r:id="rId15"/>
+    <p:sldId id="487" r:id="rId16"/>
+    <p:sldId id="488" r:id="rId17"/>
+    <p:sldId id="489" r:id="rId18"/>
+    <p:sldId id="490" r:id="rId19"/>
+    <p:sldId id="491" r:id="rId20"/>
+    <p:sldId id="492" r:id="rId21"/>
+    <p:sldId id="493" r:id="rId22"/>
+    <p:sldId id="494" r:id="rId23"/>
+    <p:sldId id="501" r:id="rId24"/>
+    <p:sldId id="496" r:id="rId25"/>
+    <p:sldId id="497" r:id="rId26"/>
+    <p:sldId id="498" r:id="rId27"/>
+    <p:sldId id="499" r:id="rId28"/>
+    <p:sldId id="500" r:id="rId29"/>
+    <p:sldId id="502" r:id="rId30"/>
+    <p:sldId id="503" r:id="rId31"/>
+    <p:sldId id="504" r:id="rId32"/>
+    <p:sldId id="505" r:id="rId33"/>
+    <p:sldId id="391" r:id="rId34"/>
+    <p:sldId id="300" r:id="rId35"/>
+    <p:sldId id="484" r:id="rId36"/>
+    <p:sldId id="364" r:id="rId37"/>
+    <p:sldId id="281" r:id="rId38"/>
+    <p:sldId id="377" r:id="rId39"/>
+    <p:sldId id="301" r:id="rId40"/>
+    <p:sldId id="302" r:id="rId41"/>
+    <p:sldId id="335" r:id="rId42"/>
   </p:sldIdLst>
   <p:sldSz cx="9144000" cy="5143500" type="screen16x9"/>
   <p:notesSz cx="9144000" cy="5143500"/>
@@ -249,7 +248,7 @@
           <a:p>
             <a:fld id="{929D4DEE-AA18-4B6A-845C-60AFD9463AA2}" type="datetimeFigureOut">
               <a:rPr lang="ru-RU" smtClean="0"/>
-              <a:t>19.10.2024</a:t>
+              <a:t>08.11.2024</a:t>
             </a:fld>
             <a:endParaRPr lang="ru-RU"/>
           </a:p>
@@ -2543,7 +2542,7 @@
           <a:p>
             <a:fld id="{1D8BD707-D9CF-40AE-B4C6-C98DA3205C09}" type="datetimeFigureOut">
               <a:rPr lang="en-US"/>
-              <a:t>10/19/24</a:t>
+              <a:t>11/8/24</a:t>
             </a:fld>
             <a:endParaRPr lang="en-US"/>
           </a:p>
@@ -2718,7 +2717,7 @@
           <a:p>
             <a:fld id="{1D8BD707-D9CF-40AE-B4C6-C98DA3205C09}" type="datetimeFigureOut">
               <a:rPr lang="en-US"/>
-              <a:t>10/19/24</a:t>
+              <a:t>11/8/24</a:t>
             </a:fld>
             <a:endParaRPr lang="en-US"/>
           </a:p>
@@ -2974,7 +2973,7 @@
           <a:p>
             <a:fld id="{1D8BD707-D9CF-40AE-B4C6-C98DA3205C09}" type="datetimeFigureOut">
               <a:rPr lang="en-US"/>
-              <a:t>10/19/24</a:t>
+              <a:t>11/8/24</a:t>
             </a:fld>
             <a:endParaRPr lang="en-US"/>
           </a:p>
@@ -3152,7 +3151,7 @@
           <a:p>
             <a:fld id="{1D8BD707-D9CF-40AE-B4C6-C98DA3205C09}" type="datetimeFigureOut">
               <a:rPr lang="en-US"/>
-              <a:t>10/19/24</a:t>
+              <a:t>11/8/24</a:t>
             </a:fld>
             <a:endParaRPr lang="en-US"/>
           </a:p>
@@ -3271,7 +3270,7 @@
           <a:p>
             <a:fld id="{1D8BD707-D9CF-40AE-B4C6-C98DA3205C09}" type="datetimeFigureOut">
               <a:rPr lang="en-US"/>
-              <a:t>10/19/24</a:t>
+              <a:t>11/8/24</a:t>
             </a:fld>
             <a:endParaRPr lang="en-US"/>
           </a:p>
@@ -5972,7 +5971,7 @@
           <a:p>
             <a:fld id="{1D8BD707-D9CF-40AE-B4C6-C98DA3205C09}" type="datetimeFigureOut">
               <a:rPr lang="en-US"/>
-              <a:t>10/19/24</a:t>
+              <a:t>11/8/24</a:t>
             </a:fld>
             <a:endParaRPr lang="en-US"/>
           </a:p>
@@ -6555,154 +6554,6 @@
         </p:nvSpPr>
         <p:spPr>
           <a:xfrm>
-            <a:off x="500550" y="1276350"/>
-            <a:ext cx="8520600" cy="2585323"/>
-          </a:xfrm>
-          <a:prstGeom prst="rect">
-            <a:avLst/>
-          </a:prstGeom>
-          <a:noFill/>
-        </p:spPr>
-        <p:txBody>
-          <a:bodyPr wrap="square" rtlCol="0">
-            <a:spAutoFit/>
-          </a:bodyPr>
-          <a:lstStyle/>
-          <a:p>
-            <a:r>
-              <a:rPr lang="ru-RU" dirty="0"/>
-              <a:t>Это метод, который помогает принимать решения на основе данных. </a:t>
-            </a:r>
-          </a:p>
-          <a:p>
-            <a:r>
-              <a:rPr lang="ru-RU" dirty="0"/>
-              <a:t>Он используется, чтобы проверить, правдиво ли наше предположение (гипотеза) о каком-то явлении или нет. </a:t>
-            </a:r>
-          </a:p>
-          <a:p>
-            <a:r>
-              <a:rPr lang="ru-RU" dirty="0"/>
-              <a:t>Например, мы можем предположить, что два разных продукта одинаково популярны, и с помощью теста проверим, так ли это.</a:t>
-            </a:r>
-          </a:p>
-          <a:p>
-            <a:endParaRPr lang="ru-RU" dirty="0"/>
-          </a:p>
-          <a:p>
-            <a:pPr marL="285750" indent="-285750">
-              <a:buFont typeface="Arial" panose="020B0604020202020204" pitchFamily="34" charset="0"/>
-              <a:buChar char="•"/>
-            </a:pPr>
-            <a:r>
-              <a:rPr lang="ru-RU" dirty="0"/>
-              <a:t>А/А тест</a:t>
-            </a:r>
-          </a:p>
-          <a:p>
-            <a:pPr marL="285750" indent="-285750">
-              <a:buFont typeface="Arial" panose="020B0604020202020204" pitchFamily="34" charset="0"/>
-              <a:buChar char="•"/>
-            </a:pPr>
-            <a:r>
-              <a:rPr lang="ru-RU" dirty="0"/>
-              <a:t>А/Б тест</a:t>
-            </a:r>
-          </a:p>
-          <a:p>
-            <a:pPr marL="285750" indent="-285750">
-              <a:buFont typeface="Arial" panose="020B0604020202020204" pitchFamily="34" charset="0"/>
-              <a:buChar char="•"/>
-            </a:pPr>
-            <a:r>
-              <a:rPr lang="ru-RU" dirty="0"/>
-              <a:t>А/Б/</a:t>
-            </a:r>
-            <a:r>
-              <a:rPr lang="en-US" dirty="0"/>
-              <a:t>n </a:t>
-            </a:r>
-            <a:r>
-              <a:rPr lang="ru-RU" dirty="0"/>
-              <a:t>тест</a:t>
-            </a:r>
-            <a:endParaRPr lang="en-US" dirty="0"/>
-          </a:p>
-        </p:txBody>
-      </p:sp>
-    </p:spTree>
-    <p:extLst>
-      <p:ext uri="{BB962C8B-B14F-4D97-AF65-F5344CB8AC3E}">
-        <p14:creationId xmlns:p14="http://schemas.microsoft.com/office/powerpoint/2010/main" val="422485876"/>
-      </p:ext>
-    </p:extLst>
-  </p:cSld>
-  <p:clrMapOvr>
-    <a:masterClrMapping/>
-  </p:clrMapOvr>
-</p:sld>
-</file>
-
-<file path=ppt/slides/slide12.xml><?xml version="1.0" encoding="utf-8"?>
-<p:sld xmlns:a="http://schemas.openxmlformats.org/drawingml/2006/main" xmlns:r="http://schemas.openxmlformats.org/officeDocument/2006/relationships" xmlns:p="http://schemas.openxmlformats.org/presentationml/2006/main">
-  <p:cSld>
-    <p:spTree>
-      <p:nvGrpSpPr>
-        <p:cNvPr id="1" name=""/>
-        <p:cNvGrpSpPr/>
-        <p:nvPr/>
-      </p:nvGrpSpPr>
-      <p:grpSpPr>
-        <a:xfrm>
-          <a:off x="0" y="0"/>
-          <a:ext cx="0" cy="0"/>
-          <a:chOff x="0" y="0"/>
-          <a:chExt cx="0" cy="0"/>
-        </a:xfrm>
-      </p:grpSpPr>
-      <p:sp>
-        <p:nvSpPr>
-          <p:cNvPr id="2" name="Title 1">
-            <a:extLst>
-              <a:ext uri="{FF2B5EF4-FFF2-40B4-BE49-F238E27FC236}">
-                <a16:creationId xmlns:a16="http://schemas.microsoft.com/office/drawing/2014/main" id="{73186EB4-0F15-CE45-856A-EC3EBA601CE6}"/>
-              </a:ext>
-            </a:extLst>
-          </p:cNvPr>
-          <p:cNvSpPr>
-            <a:spLocks noGrp="1"/>
-          </p:cNvSpPr>
-          <p:nvPr>
-            <p:ph type="title"/>
-          </p:nvPr>
-        </p:nvSpPr>
-        <p:spPr/>
-        <p:txBody>
-          <a:bodyPr/>
-          <a:lstStyle/>
-          <a:p>
-            <a:r>
-              <a:rPr lang="ru-RU" dirty="0"/>
-              <a:t>Статистический тест</a:t>
-            </a:r>
-            <a:endParaRPr lang="en-US" dirty="0"/>
-          </a:p>
-        </p:txBody>
-      </p:sp>
-      <p:sp>
-        <p:nvSpPr>
-          <p:cNvPr id="4" name="TextBox 3">
-            <a:extLst>
-              <a:ext uri="{FF2B5EF4-FFF2-40B4-BE49-F238E27FC236}">
-                <a16:creationId xmlns:a16="http://schemas.microsoft.com/office/drawing/2014/main" id="{4288CBD5-66A7-7C43-823A-9E9B7465C8A7}"/>
-              </a:ext>
-            </a:extLst>
-          </p:cNvPr>
-          <p:cNvSpPr txBox="1"/>
-          <p:nvPr/>
-        </p:nvSpPr>
-        <p:spPr>
-          <a:xfrm>
             <a:off x="500550" y="1412064"/>
             <a:ext cx="8520600" cy="2308324"/>
           </a:xfrm>
@@ -6763,7 +6614,7 @@
 </p:sld>
 </file>
 
-<file path=ppt/slides/slide13.xml><?xml version="1.0" encoding="utf-8"?>
+<file path=ppt/slides/slide12.xml><?xml version="1.0" encoding="utf-8"?>
 <p:sld xmlns:a="http://schemas.openxmlformats.org/drawingml/2006/main" xmlns:r="http://schemas.openxmlformats.org/officeDocument/2006/relationships" xmlns:p="http://schemas.openxmlformats.org/presentationml/2006/main">
   <p:cSld>
     <p:spTree>
@@ -6919,7 +6770,7 @@
 </p:sld>
 </file>
 
-<file path=ppt/slides/slide14.xml><?xml version="1.0" encoding="utf-8"?>
+<file path=ppt/slides/slide13.xml><?xml version="1.0" encoding="utf-8"?>
 <p:sld xmlns:a="http://schemas.openxmlformats.org/drawingml/2006/main" xmlns:r="http://schemas.openxmlformats.org/officeDocument/2006/relationships" xmlns:p="http://schemas.openxmlformats.org/presentationml/2006/main">
   <p:cSld>
     <p:spTree>
@@ -6998,7 +6849,7 @@
 </p:sld>
 </file>
 
-<file path=ppt/slides/slide15.xml><?xml version="1.0" encoding="utf-8"?>
+<file path=ppt/slides/slide14.xml><?xml version="1.0" encoding="utf-8"?>
 <p:sld xmlns:a="http://schemas.openxmlformats.org/drawingml/2006/main" xmlns:r="http://schemas.openxmlformats.org/officeDocument/2006/relationships" xmlns:p="http://schemas.openxmlformats.org/presentationml/2006/main">
   <p:cSld>
     <p:spTree>
@@ -8161,8 +8012,8 @@
           </a:fontRef>
         </p:style>
       </p:cxnSp>
-      <mc:AlternateContent xmlns:mc="http://schemas.openxmlformats.org/markup-compatibility/2006">
-        <mc:Choice xmlns:a14="http://schemas.microsoft.com/office/drawing/2010/main" Requires="a14">
+      <mc:AlternateContent xmlns:mc="http://schemas.openxmlformats.org/markup-compatibility/2006" xmlns:a14="http://schemas.microsoft.com/office/drawing/2010/main">
+        <mc:Choice Requires="a14">
           <p:sp>
             <p:nvSpPr>
               <p:cNvPr id="5" name="TextBox 4">
@@ -8231,7 +8082,7 @@
             </p:txBody>
           </p:sp>
         </mc:Choice>
-        <mc:Fallback>
+        <mc:Fallback xmlns="">
           <p:sp>
             <p:nvSpPr>
               <p:cNvPr id="5" name="TextBox 4">
@@ -8276,8 +8127,8 @@
           </p:sp>
         </mc:Fallback>
       </mc:AlternateContent>
-      <mc:AlternateContent xmlns:mc="http://schemas.openxmlformats.org/markup-compatibility/2006">
-        <mc:Choice xmlns:a14="http://schemas.microsoft.com/office/drawing/2010/main" Requires="a14">
+      <mc:AlternateContent xmlns:mc="http://schemas.openxmlformats.org/markup-compatibility/2006" xmlns:a14="http://schemas.microsoft.com/office/drawing/2010/main">
+        <mc:Choice Requires="a14">
           <p:sp>
             <p:nvSpPr>
               <p:cNvPr id="12" name="TextBox 11">
@@ -8352,7 +8203,7 @@
             </p:txBody>
           </p:sp>
         </mc:Choice>
-        <mc:Fallback>
+        <mc:Fallback xmlns="">
           <p:sp>
             <p:nvSpPr>
               <p:cNvPr id="12" name="TextBox 11">
@@ -8410,7 +8261,7 @@
 </p:sld>
 </file>
 
-<file path=ppt/slides/slide16.xml><?xml version="1.0" encoding="utf-8"?>
+<file path=ppt/slides/slide15.xml><?xml version="1.0" encoding="utf-8"?>
 <p:sld xmlns:a="http://schemas.openxmlformats.org/drawingml/2006/main" xmlns:r="http://schemas.openxmlformats.org/officeDocument/2006/relationships" xmlns:p="http://schemas.openxmlformats.org/presentationml/2006/main">
   <p:cSld>
     <p:spTree>
@@ -8456,8 +8307,8 @@
           </a:p>
         </p:txBody>
       </p:sp>
-      <mc:AlternateContent xmlns:mc="http://schemas.openxmlformats.org/markup-compatibility/2006">
-        <mc:Choice xmlns:a14="http://schemas.microsoft.com/office/drawing/2010/main" Requires="a14">
+      <mc:AlternateContent xmlns:mc="http://schemas.openxmlformats.org/markup-compatibility/2006" xmlns:a14="http://schemas.microsoft.com/office/drawing/2010/main">
+        <mc:Choice Requires="a14">
           <p:sp>
             <p:nvSpPr>
               <p:cNvPr id="12" name="TextBox 11">
@@ -8664,7 +8515,7 @@
             </p:txBody>
           </p:sp>
         </mc:Choice>
-        <mc:Fallback>
+        <mc:Fallback xmlns="">
           <p:sp>
             <p:nvSpPr>
               <p:cNvPr id="12" name="TextBox 11">
@@ -8722,7 +8573,7 @@
 </p:sld>
 </file>
 
-<file path=ppt/slides/slide17.xml><?xml version="1.0" encoding="utf-8"?>
+<file path=ppt/slides/slide16.xml><?xml version="1.0" encoding="utf-8"?>
 <p:sld xmlns:a="http://schemas.openxmlformats.org/drawingml/2006/main" xmlns:r="http://schemas.openxmlformats.org/officeDocument/2006/relationships" xmlns:p="http://schemas.openxmlformats.org/presentationml/2006/main">
   <p:cSld>
     <p:spTree>
@@ -8792,6 +8643,187 @@
     <p:extLst>
       <p:ext uri="{BB962C8B-B14F-4D97-AF65-F5344CB8AC3E}">
         <p14:creationId xmlns:p14="http://schemas.microsoft.com/office/powerpoint/2010/main" val="1098196870"/>
+      </p:ext>
+    </p:extLst>
+  </p:cSld>
+  <p:clrMapOvr>
+    <a:masterClrMapping/>
+  </p:clrMapOvr>
+</p:sld>
+</file>
+
+<file path=ppt/slides/slide17.xml><?xml version="1.0" encoding="utf-8"?>
+<p:sld xmlns:a="http://schemas.openxmlformats.org/drawingml/2006/main" xmlns:r="http://schemas.openxmlformats.org/officeDocument/2006/relationships" xmlns:p="http://schemas.openxmlformats.org/presentationml/2006/main">
+  <p:cSld>
+    <p:spTree>
+      <p:nvGrpSpPr>
+        <p:cNvPr id="1" name=""/>
+        <p:cNvGrpSpPr/>
+        <p:nvPr/>
+      </p:nvGrpSpPr>
+      <p:grpSpPr>
+        <a:xfrm>
+          <a:off x="0" y="0"/>
+          <a:ext cx="0" cy="0"/>
+          <a:chOff x="0" y="0"/>
+          <a:chExt cx="0" cy="0"/>
+        </a:xfrm>
+      </p:grpSpPr>
+      <p:sp>
+        <p:nvSpPr>
+          <p:cNvPr id="3" name="Title 2">
+            <a:extLst>
+              <a:ext uri="{FF2B5EF4-FFF2-40B4-BE49-F238E27FC236}">
+                <a16:creationId xmlns:a16="http://schemas.microsoft.com/office/drawing/2014/main" id="{B6638231-D78E-9046-971E-9007915E5526}"/>
+              </a:ext>
+            </a:extLst>
+          </p:cNvPr>
+          <p:cNvSpPr>
+            <a:spLocks noGrp="1"/>
+          </p:cNvSpPr>
+          <p:nvPr>
+            <p:ph type="title"/>
+          </p:nvPr>
+        </p:nvSpPr>
+        <p:spPr/>
+        <p:txBody>
+          <a:bodyPr/>
+          <a:lstStyle/>
+          <a:p>
+            <a:r>
+              <a:rPr lang="ru-RU" dirty="0"/>
+              <a:t>А/А тест</a:t>
+            </a:r>
+            <a:endParaRPr lang="en-US" dirty="0"/>
+          </a:p>
+        </p:txBody>
+      </p:sp>
+      <p:sp>
+        <p:nvSpPr>
+          <p:cNvPr id="12" name="TextBox 11">
+            <a:extLst>
+              <a:ext uri="{FF2B5EF4-FFF2-40B4-BE49-F238E27FC236}">
+                <a16:creationId xmlns:a16="http://schemas.microsoft.com/office/drawing/2014/main" id="{1819CB8B-B37B-2C46-AC3C-34651421193A}"/>
+              </a:ext>
+            </a:extLst>
+          </p:cNvPr>
+          <p:cNvSpPr txBox="1"/>
+          <p:nvPr/>
+        </p:nvSpPr>
+        <p:spPr>
+          <a:xfrm>
+            <a:off x="500550" y="1352550"/>
+            <a:ext cx="8520600" cy="2985433"/>
+          </a:xfrm>
+          <a:prstGeom prst="rect">
+            <a:avLst/>
+          </a:prstGeom>
+          <a:noFill/>
+        </p:spPr>
+        <p:txBody>
+          <a:bodyPr wrap="square" rtlCol="0">
+            <a:spAutoFit/>
+          </a:bodyPr>
+          <a:lstStyle/>
+          <a:p>
+            <a:pPr>
+              <a:spcAft>
+                <a:spcPts val="1200"/>
+              </a:spcAft>
+            </a:pPr>
+            <a:r>
+              <a:rPr lang="ru-RU" sz="1400" b="1" dirty="0"/>
+              <a:t>Точность разделения трафика и измерений: </a:t>
+            </a:r>
+            <a:r>
+              <a:rPr lang="en-US" sz="1400" dirty="0"/>
+              <a:t>A/A-</a:t>
+            </a:r>
+            <a:r>
+              <a:rPr lang="ru-RU" sz="1400" dirty="0"/>
+              <a:t>тесты служат важной предварительной проверкой для любой системы сплит- тестирования. Проведение </a:t>
+            </a:r>
+            <a:r>
+              <a:rPr lang="en-US" sz="1400" dirty="0"/>
+              <a:t>A/A-</a:t>
+            </a:r>
+            <a:r>
+              <a:rPr lang="ru-RU" sz="1400" dirty="0"/>
+              <a:t>теста означает запуск теста, в котором обе группы (контрольная и тестовая) получают одинаковый пользовательский опыт или продукт без каких-либо изменений. </a:t>
+            </a:r>
+            <a:br>
+              <a:rPr lang="ru-RU" sz="1400" dirty="0"/>
+            </a:br>
+            <a:r>
+              <a:rPr lang="ru-RU" sz="1400" dirty="0"/>
+              <a:t>Основная цель здесь — убедиться, что система сплит-тестирования корректно разделяет пользователей на группы и точно отслеживает их поведение, не внося в процесс искусственных искажений или предвзятости.</a:t>
+            </a:r>
+          </a:p>
+          <a:p>
+            <a:pPr>
+              <a:spcAft>
+                <a:spcPts val="1200"/>
+              </a:spcAft>
+            </a:pPr>
+            <a:r>
+              <a:rPr lang="ru-RU" sz="1400" b="1" dirty="0"/>
+              <a:t>Проверка равномерности распределения:</a:t>
+            </a:r>
+            <a:r>
+              <a:rPr lang="ru-RU" sz="1400" dirty="0"/>
+              <a:t> </a:t>
+            </a:r>
+            <a:r>
+              <a:rPr lang="en-US" sz="1400" dirty="0"/>
+              <a:t>A/A-</a:t>
+            </a:r>
+            <a:r>
+              <a:rPr lang="ru-RU" sz="1400" dirty="0"/>
+              <a:t>тесты позволяют убедиться, что распределение пользователей между группами равномерное и случайное. Это критически важно для обеспечения того, чтобы любые наблюдаемые различия в результатах </a:t>
+            </a:r>
+            <a:r>
+              <a:rPr lang="en-US" sz="1400" dirty="0"/>
+              <a:t>A/B-</a:t>
+            </a:r>
+            <a:r>
+              <a:rPr lang="ru-RU" sz="1400" dirty="0"/>
+              <a:t>теста были результатом введенных изменений, а не неравномерности в распределении пользователей.</a:t>
+            </a:r>
+          </a:p>
+          <a:p>
+            <a:pPr>
+              <a:spcAft>
+                <a:spcPts val="1200"/>
+              </a:spcAft>
+            </a:pPr>
+            <a:r>
+              <a:rPr lang="ru-RU" sz="1400" b="1" dirty="0"/>
+              <a:t>Валидация точности измерений: </a:t>
+            </a:r>
+            <a:r>
+              <a:rPr lang="en-US" sz="1400" dirty="0"/>
+              <a:t>c </a:t>
+            </a:r>
+            <a:r>
+              <a:rPr lang="ru-RU" sz="1400" dirty="0"/>
+              <a:t>помощью </a:t>
+            </a:r>
+            <a:r>
+              <a:rPr lang="en-US" sz="1400" dirty="0"/>
+              <a:t>A/A-</a:t>
+            </a:r>
+            <a:r>
+              <a:rPr lang="ru-RU" sz="1400" dirty="0"/>
+              <a:t>тестов можно также проверить, что инструментарий аналитики и сбора данных работает корректно, и что метрики отслеживаются точно и без ошибок.</a:t>
+            </a:r>
+            <a:endParaRPr lang="en-US" sz="1400" dirty="0"/>
+          </a:p>
+        </p:txBody>
+      </p:sp>
+    </p:spTree>
+    <p:extLst>
+      <p:ext uri="{BB962C8B-B14F-4D97-AF65-F5344CB8AC3E}">
+        <p14:creationId xmlns:p14="http://schemas.microsoft.com/office/powerpoint/2010/main" val="1667252935"/>
       </p:ext>
     </p:extLst>
   </p:cSld>
@@ -8862,7 +8894,7 @@
         <p:spPr>
           <a:xfrm>
             <a:off x="500550" y="1352550"/>
-            <a:ext cx="8520600" cy="2985433"/>
+            <a:ext cx="8520600" cy="3139321"/>
           </a:xfrm>
           <a:prstGeom prst="rect">
             <a:avLst/>
@@ -8881,31 +8913,20 @@
               </a:spcAft>
             </a:pPr>
             <a:r>
-              <a:rPr lang="ru-RU" sz="1400" b="1" dirty="0"/>
-              <a:t>Точность разделения трафика и измерений: </a:t>
-            </a:r>
-            <a:r>
               <a:rPr lang="en-US" sz="1400" dirty="0"/>
               <a:t>A/A-</a:t>
             </a:r>
             <a:r>
               <a:rPr lang="ru-RU" sz="1400" dirty="0"/>
-              <a:t>тесты служат важной предварительной проверкой для любой системы сплит- тестирования. Проведение </a:t>
+              <a:t>тестирование не только подтверждает надежность системы сплит-тестирования, но и помогает выявить потенциальные проблемы с данными и аналитическими инструментами, которые могут исказить результаты последующих </a:t>
             </a:r>
             <a:r>
               <a:rPr lang="en-US" sz="1400" dirty="0"/>
-              <a:t>A/A-</a:t>
+              <a:t>A/B-</a:t>
             </a:r>
             <a:r>
               <a:rPr lang="ru-RU" sz="1400" dirty="0"/>
-              <a:t>теста означает запуск теста, в котором обе группы (контрольная и тестовая) получают одинаковый пользовательский опыт или продукт без каких-либо изменений. </a:t>
-            </a:r>
-            <a:br>
-              <a:rPr lang="ru-RU" sz="1400" dirty="0"/>
-            </a:br>
-            <a:r>
-              <a:rPr lang="ru-RU" sz="1400" dirty="0"/>
-              <a:t>Основная цель здесь — убедиться, что система сплит-тестирования корректно разделяет пользователей на группы и точно отслеживает их поведение, не внося в процесс искусственных искажений или предвзятости.</a:t>
+              <a:t>тестов.</a:t>
             </a:r>
           </a:p>
           <a:p>
@@ -8916,11 +8937,11 @@
             </a:pPr>
             <a:r>
               <a:rPr lang="ru-RU" sz="1400" b="1" dirty="0"/>
-              <a:t>Проверка равномерности распределения:</a:t>
+              <a:t>Идентификация проблем с качеством данных: </a:t>
             </a:r>
             <a:r>
               <a:rPr lang="ru-RU" sz="1400" dirty="0"/>
-              <a:t> </a:t>
+              <a:t>на этапе </a:t>
             </a:r>
             <a:r>
               <a:rPr lang="en-US" sz="1400" dirty="0"/>
@@ -8928,15 +8949,7 @@
             </a:r>
             <a:r>
               <a:rPr lang="ru-RU" sz="1400" dirty="0"/>
-              <a:t>тесты позволяют убедиться, что распределение пользователей между группами равномерное и случайное. Это критически важно для обеспечения того, чтобы любые наблюдаемые различия в результатах </a:t>
-            </a:r>
-            <a:r>
-              <a:rPr lang="en-US" sz="1400" dirty="0"/>
-              <a:t>A/B-</a:t>
-            </a:r>
-            <a:r>
-              <a:rPr lang="ru-RU" sz="1400" dirty="0"/>
-              <a:t>теста были результатом введенных изменений, а не неравномерности в распределении пользователей.</a:t>
+              <a:t>тестирования можно выявить проблемы, связанные с качеством данных, такие как неполные данные, ошибки отслеживания или проблемы с интеграцией между различными аналитическими платформами.</a:t>
             </a:r>
           </a:p>
           <a:p>
@@ -8947,15 +8960,7 @@
             </a:pPr>
             <a:r>
               <a:rPr lang="ru-RU" sz="1400" b="1" dirty="0"/>
-              <a:t>Валидация точности измерений: </a:t>
-            </a:r>
-            <a:r>
-              <a:rPr lang="en-US" sz="1400" dirty="0"/>
-              <a:t>c </a:t>
-            </a:r>
-            <a:r>
-              <a:rPr lang="ru-RU" sz="1400" dirty="0"/>
-              <a:t>помощью </a:t>
+              <a:t>Выявление технических недостатков: </a:t>
             </a:r>
             <a:r>
               <a:rPr lang="en-US" sz="1400" dirty="0"/>
@@ -8963,7 +8968,58 @@
             </a:r>
             <a:r>
               <a:rPr lang="ru-RU" sz="1400" dirty="0"/>
-              <a:t>тестов можно также проверить, что инструментарий аналитики и сбора данных работает корректно, и что метрики отслеживаются точно и без ошибок.</a:t>
+              <a:t>тесты могут указать на технические проблемы в инструментарии сплит-тестирования, включая ошибки в разделении трафика, неправильную настройку целевых страниц или сбои в отслеживании событий.</a:t>
+            </a:r>
+          </a:p>
+          <a:p>
+            <a:pPr>
+              <a:spcAft>
+                <a:spcPts val="1200"/>
+              </a:spcAft>
+            </a:pPr>
+            <a:r>
+              <a:rPr lang="ru-RU" sz="1400" dirty="0"/>
+              <a:t>Важно, что </a:t>
+            </a:r>
+            <a:r>
+              <a:rPr lang="ru-RU" sz="1400" b="1" dirty="0"/>
+              <a:t>если в процессе </a:t>
+            </a:r>
+            <a:r>
+              <a:rPr lang="en-US" sz="1400" b="1" dirty="0"/>
+              <a:t>A/A-</a:t>
+            </a:r>
+            <a:r>
+              <a:rPr lang="ru-RU" sz="1400" b="1" dirty="0"/>
+              <a:t>тестирования обнаруживаются статистически значимые различия </a:t>
+            </a:r>
+            <a:r>
+              <a:rPr lang="ru-RU" sz="1400" dirty="0"/>
+              <a:t>между группами, это служит сигналом о существующих </a:t>
+            </a:r>
+            <a:r>
+              <a:rPr lang="ru-RU" sz="1400" b="1" dirty="0"/>
+              <a:t>проблемах</a:t>
+            </a:r>
+            <a:r>
+              <a:rPr lang="ru-RU" sz="1400" dirty="0"/>
+              <a:t>, которые </a:t>
+            </a:r>
+            <a:r>
+              <a:rPr lang="ru-RU" sz="1400" b="1" dirty="0"/>
+              <a:t>необходимо устранить </a:t>
+            </a:r>
+            <a:r>
+              <a:rPr lang="ru-RU" sz="1400" dirty="0"/>
+              <a:t>перед запуском </a:t>
+            </a:r>
+            <a:r>
+              <a:rPr lang="en-US" sz="1400" dirty="0"/>
+              <a:t>A/B-</a:t>
+            </a:r>
+            <a:r>
+              <a:rPr lang="ru-RU" sz="1400" dirty="0"/>
+              <a:t>тестов.</a:t>
             </a:r>
             <a:endParaRPr lang="en-US" sz="1400" dirty="0"/>
           </a:p>
@@ -8972,7 +9028,7 @@
     </p:spTree>
     <p:extLst>
       <p:ext uri="{BB962C8B-B14F-4D97-AF65-F5344CB8AC3E}">
-        <p14:creationId xmlns:p14="http://schemas.microsoft.com/office/powerpoint/2010/main" val="1667252935"/>
+        <p14:creationId xmlns:p14="http://schemas.microsoft.com/office/powerpoint/2010/main" val="1258404369"/>
       </p:ext>
     </p:extLst>
   </p:cSld>
@@ -8987,7 +9043,7 @@
   <p:cSld>
     <p:spTree>
       <p:nvGrpSpPr>
-        <p:cNvPr id="1" name=""/>
+        <p:cNvPr id="1" name="Shape 479"/>
         <p:cNvGrpSpPr/>
         <p:nvPr/>
       </p:nvGrpSpPr>
@@ -9001,183 +9057,57 @@
       </p:grpSpPr>
       <p:sp>
         <p:nvSpPr>
-          <p:cNvPr id="3" name="Title 2">
-            <a:extLst>
-              <a:ext uri="{FF2B5EF4-FFF2-40B4-BE49-F238E27FC236}">
-                <a16:creationId xmlns:a16="http://schemas.microsoft.com/office/drawing/2014/main" id="{B6638231-D78E-9046-971E-9007915E5526}"/>
-              </a:ext>
-            </a:extLst>
-          </p:cNvPr>
-          <p:cNvSpPr>
+          <p:cNvPr id="480" name="Google Shape;480;p74"/>
+          <p:cNvSpPr txBox="1">
             <a:spLocks noGrp="1"/>
           </p:cNvSpPr>
           <p:nvPr>
             <p:ph type="title"/>
           </p:nvPr>
         </p:nvSpPr>
-        <p:spPr/>
-        <p:txBody>
-          <a:bodyPr/>
-          <a:lstStyle/>
-          <a:p>
-            <a:r>
-              <a:rPr lang="ru-RU" dirty="0"/>
-              <a:t>А/А тест</a:t>
-            </a:r>
-            <a:endParaRPr lang="en-US" dirty="0"/>
-          </a:p>
-        </p:txBody>
-      </p:sp>
-      <p:sp>
-        <p:nvSpPr>
-          <p:cNvPr id="12" name="TextBox 11">
-            <a:extLst>
-              <a:ext uri="{FF2B5EF4-FFF2-40B4-BE49-F238E27FC236}">
-                <a16:creationId xmlns:a16="http://schemas.microsoft.com/office/drawing/2014/main" id="{1819CB8B-B37B-2C46-AC3C-34651421193A}"/>
-              </a:ext>
-            </a:extLst>
-          </p:cNvPr>
-          <p:cNvSpPr txBox="1"/>
-          <p:nvPr/>
-        </p:nvSpPr>
         <p:spPr>
           <a:xfrm>
-            <a:off x="500550" y="1352550"/>
-            <a:ext cx="8520600" cy="3139321"/>
+            <a:off x="651425" y="396394"/>
+            <a:ext cx="7706100" cy="4090800"/>
           </a:xfrm>
           <a:prstGeom prst="rect">
             <a:avLst/>
           </a:prstGeom>
           <a:noFill/>
+          <a:ln>
+            <a:noFill/>
+          </a:ln>
         </p:spPr>
         <p:txBody>
-          <a:bodyPr wrap="square" rtlCol="0">
-            <a:spAutoFit/>
+          <a:bodyPr spcFirstLastPara="1" wrap="square" lIns="91425" tIns="91425" rIns="91425" bIns="91425" anchor="ctr" anchorCtr="0">
+            <a:noAutofit/>
           </a:bodyPr>
           <a:lstStyle/>
           <a:p>
-            <a:pPr>
+            <a:pPr marL="0" lvl="0" indent="0" algn="l" rtl="0">
+              <a:lnSpc>
+                <a:spcPct val="100000"/>
+              </a:lnSpc>
+              <a:spcBef>
+                <a:spcPts val="0"/>
+              </a:spcBef>
               <a:spcAft>
-                <a:spcPts val="1200"/>
+                <a:spcPts val="0"/>
               </a:spcAft>
+              <a:buSzPts val="4600"/>
+              <a:buNone/>
             </a:pPr>
             <a:r>
-              <a:rPr lang="en-US" sz="1400" dirty="0"/>
-              <a:t>A/A-</a:t>
-            </a:r>
-            <a:r>
-              <a:rPr lang="ru-RU" sz="1400" dirty="0"/>
-              <a:t>тестирование не только подтверждает надежность системы сплит-тестирования, но и помогает выявить потенциальные проблемы с данными и аналитическими инструментами, которые могут исказить результаты последующих </a:t>
-            </a:r>
-            <a:r>
-              <a:rPr lang="en-US" sz="1400" dirty="0"/>
-              <a:t>A/B-</a:t>
-            </a:r>
-            <a:r>
-              <a:rPr lang="ru-RU" sz="1400" dirty="0"/>
-              <a:t>тестов.</a:t>
-            </a:r>
-          </a:p>
-          <a:p>
-            <a:pPr>
-              <a:spcAft>
-                <a:spcPts val="1200"/>
-              </a:spcAft>
-            </a:pPr>
-            <a:r>
-              <a:rPr lang="ru-RU" sz="1400" b="1" dirty="0"/>
-              <a:t>Идентификация проблем с качеством данных: </a:t>
-            </a:r>
-            <a:r>
-              <a:rPr lang="ru-RU" sz="1400" dirty="0"/>
-              <a:t>на этапе </a:t>
-            </a:r>
-            <a:r>
-              <a:rPr lang="en-US" sz="1400" dirty="0"/>
-              <a:t>A/A-</a:t>
-            </a:r>
-            <a:r>
-              <a:rPr lang="ru-RU" sz="1400" dirty="0"/>
-              <a:t>тестирования можно выявить проблемы, связанные с качеством данных, такие как неполные данные, ошибки отслеживания или проблемы с интеграцией между различными аналитическими платформами.</a:t>
-            </a:r>
-          </a:p>
-          <a:p>
-            <a:pPr>
-              <a:spcAft>
-                <a:spcPts val="1200"/>
-              </a:spcAft>
-            </a:pPr>
-            <a:r>
-              <a:rPr lang="ru-RU" sz="1400" b="1" dirty="0"/>
-              <a:t>Выявление технических недостатков: </a:t>
-            </a:r>
-            <a:r>
-              <a:rPr lang="en-US" sz="1400" dirty="0"/>
-              <a:t>A/A-</a:t>
-            </a:r>
-            <a:r>
-              <a:rPr lang="ru-RU" sz="1400" dirty="0"/>
-              <a:t>тесты могут указать на технические проблемы в инструментарии сплит-тестирования, включая ошибки в разделении трафика, неправильную настройку целевых страниц или сбои в отслеживании событий.</a:t>
-            </a:r>
-          </a:p>
-          <a:p>
-            <a:pPr>
-              <a:spcAft>
-                <a:spcPts val="1200"/>
-              </a:spcAft>
-            </a:pPr>
-            <a:r>
-              <a:rPr lang="ru-RU" sz="1400" dirty="0"/>
-              <a:t>Важно, что </a:t>
-            </a:r>
-            <a:r>
-              <a:rPr lang="ru-RU" sz="1400" b="1" dirty="0"/>
-              <a:t>если в процессе </a:t>
-            </a:r>
-            <a:r>
-              <a:rPr lang="en-US" sz="1400" b="1" dirty="0"/>
-              <a:t>A/A-</a:t>
-            </a:r>
-            <a:r>
-              <a:rPr lang="ru-RU" sz="1400" b="1" dirty="0"/>
-              <a:t>тестирования обнаруживаются статистически значимые различия </a:t>
-            </a:r>
-            <a:r>
-              <a:rPr lang="ru-RU" sz="1400" dirty="0"/>
-              <a:t>между группами, это служит сигналом о существующих </a:t>
-            </a:r>
-            <a:r>
-              <a:rPr lang="ru-RU" sz="1400" b="1" dirty="0"/>
-              <a:t>проблемах</a:t>
-            </a:r>
-            <a:r>
-              <a:rPr lang="ru-RU" sz="1400" dirty="0"/>
-              <a:t>, которые </a:t>
-            </a:r>
-            <a:r>
-              <a:rPr lang="ru-RU" sz="1400" b="1" dirty="0"/>
-              <a:t>необходимо устранить </a:t>
-            </a:r>
-            <a:r>
-              <a:rPr lang="ru-RU" sz="1400" dirty="0"/>
-              <a:t>перед запуском </a:t>
-            </a:r>
-            <a:r>
-              <a:rPr lang="en-US" sz="1400" dirty="0"/>
-              <a:t>A/B-</a:t>
-            </a:r>
-            <a:r>
-              <a:rPr lang="ru-RU" sz="1400" dirty="0"/>
-              <a:t>тестов.</a:t>
-            </a:r>
-            <a:endParaRPr lang="en-US" sz="1400" dirty="0"/>
+              <a:rPr lang="ru-RU" dirty="0"/>
+              <a:t>А/Б тест</a:t>
+            </a:r>
           </a:p>
         </p:txBody>
       </p:sp>
     </p:spTree>
     <p:extLst>
       <p:ext uri="{BB962C8B-B14F-4D97-AF65-F5344CB8AC3E}">
-        <p14:creationId xmlns:p14="http://schemas.microsoft.com/office/powerpoint/2010/main" val="1258404369"/>
+        <p14:creationId xmlns:p14="http://schemas.microsoft.com/office/powerpoint/2010/main" val="1546393388"/>
       </p:ext>
     </p:extLst>
   </p:cSld>
@@ -9529,85 +9459,6 @@
 </file>
 
 <file path=ppt/slides/slide20.xml><?xml version="1.0" encoding="utf-8"?>
-<p:sld xmlns:a="http://schemas.openxmlformats.org/drawingml/2006/main" xmlns:r="http://schemas.openxmlformats.org/officeDocument/2006/relationships" xmlns:p="http://schemas.openxmlformats.org/presentationml/2006/main">
-  <p:cSld>
-    <p:spTree>
-      <p:nvGrpSpPr>
-        <p:cNvPr id="1" name="Shape 479"/>
-        <p:cNvGrpSpPr/>
-        <p:nvPr/>
-      </p:nvGrpSpPr>
-      <p:grpSpPr>
-        <a:xfrm>
-          <a:off x="0" y="0"/>
-          <a:ext cx="0" cy="0"/>
-          <a:chOff x="0" y="0"/>
-          <a:chExt cx="0" cy="0"/>
-        </a:xfrm>
-      </p:grpSpPr>
-      <p:sp>
-        <p:nvSpPr>
-          <p:cNvPr id="480" name="Google Shape;480;p74"/>
-          <p:cNvSpPr txBox="1">
-            <a:spLocks noGrp="1"/>
-          </p:cNvSpPr>
-          <p:nvPr>
-            <p:ph type="title"/>
-          </p:nvPr>
-        </p:nvSpPr>
-        <p:spPr>
-          <a:xfrm>
-            <a:off x="651425" y="396394"/>
-            <a:ext cx="7706100" cy="4090800"/>
-          </a:xfrm>
-          <a:prstGeom prst="rect">
-            <a:avLst/>
-          </a:prstGeom>
-          <a:noFill/>
-          <a:ln>
-            <a:noFill/>
-          </a:ln>
-        </p:spPr>
-        <p:txBody>
-          <a:bodyPr spcFirstLastPara="1" wrap="square" lIns="91425" tIns="91425" rIns="91425" bIns="91425" anchor="ctr" anchorCtr="0">
-            <a:noAutofit/>
-          </a:bodyPr>
-          <a:lstStyle/>
-          <a:p>
-            <a:pPr marL="0" lvl="0" indent="0" algn="l" rtl="0">
-              <a:lnSpc>
-                <a:spcPct val="100000"/>
-              </a:lnSpc>
-              <a:spcBef>
-                <a:spcPts val="0"/>
-              </a:spcBef>
-              <a:spcAft>
-                <a:spcPts val="0"/>
-              </a:spcAft>
-              <a:buSzPts val="4600"/>
-              <a:buNone/>
-            </a:pPr>
-            <a:r>
-              <a:rPr lang="ru-RU" dirty="0"/>
-              <a:t>А/Б тест</a:t>
-            </a:r>
-          </a:p>
-        </p:txBody>
-      </p:sp>
-    </p:spTree>
-    <p:extLst>
-      <p:ext uri="{BB962C8B-B14F-4D97-AF65-F5344CB8AC3E}">
-        <p14:creationId xmlns:p14="http://schemas.microsoft.com/office/powerpoint/2010/main" val="1546393388"/>
-      </p:ext>
-    </p:extLst>
-  </p:cSld>
-  <p:clrMapOvr>
-    <a:masterClrMapping/>
-  </p:clrMapOvr>
-</p:sld>
-</file>
-
-<file path=ppt/slides/slide21.xml><?xml version="1.0" encoding="utf-8"?>
 <p:sld xmlns:a="http://schemas.openxmlformats.org/drawingml/2006/main" xmlns:r="http://schemas.openxmlformats.org/officeDocument/2006/relationships" xmlns:p="http://schemas.openxmlformats.org/presentationml/2006/main">
   <p:cSld>
     <p:spTree>
@@ -9726,7 +9577,7 @@
 </p:sld>
 </file>
 
-<file path=ppt/slides/slide22.xml><?xml version="1.0" encoding="utf-8"?>
+<file path=ppt/slides/slide21.xml><?xml version="1.0" encoding="utf-8"?>
 <p:sld xmlns:a="http://schemas.openxmlformats.org/drawingml/2006/main" xmlns:r="http://schemas.openxmlformats.org/officeDocument/2006/relationships" xmlns:p="http://schemas.openxmlformats.org/presentationml/2006/main">
   <p:cSld>
     <p:spTree>
@@ -9772,8 +9623,8 @@
           </a:p>
         </p:txBody>
       </p:sp>
-      <mc:AlternateContent xmlns:mc="http://schemas.openxmlformats.org/markup-compatibility/2006">
-        <mc:Choice xmlns:a14="http://schemas.microsoft.com/office/drawing/2010/main" Requires="a14">
+      <mc:AlternateContent xmlns:mc="http://schemas.openxmlformats.org/markup-compatibility/2006" xmlns:a14="http://schemas.microsoft.com/office/drawing/2010/main">
+        <mc:Choice Requires="a14">
           <p:sp>
             <p:nvSpPr>
               <p:cNvPr id="2" name="TextBox 1">
@@ -9944,7 +9795,7 @@
             </p:txBody>
           </p:sp>
         </mc:Choice>
-        <mc:Fallback>
+        <mc:Fallback xmlns="">
           <p:sp>
             <p:nvSpPr>
               <p:cNvPr id="2" name="TextBox 1">
@@ -10032,7 +9883,7 @@
 </p:sld>
 </file>
 
-<file path=ppt/slides/slide23.xml><?xml version="1.0" encoding="utf-8"?>
+<file path=ppt/slides/slide22.xml><?xml version="1.0" encoding="utf-8"?>
 <p:sld xmlns:a="http://schemas.openxmlformats.org/drawingml/2006/main" xmlns:r="http://schemas.openxmlformats.org/officeDocument/2006/relationships" xmlns:p="http://schemas.openxmlformats.org/presentationml/2006/main">
   <p:cSld>
     <p:spTree>
@@ -10078,8 +9929,8 @@
           </a:p>
         </p:txBody>
       </p:sp>
-      <mc:AlternateContent xmlns:mc="http://schemas.openxmlformats.org/markup-compatibility/2006">
-        <mc:Choice xmlns:a14="http://schemas.microsoft.com/office/drawing/2010/main" Requires="a14">
+      <mc:AlternateContent xmlns:mc="http://schemas.openxmlformats.org/markup-compatibility/2006" xmlns:a14="http://schemas.microsoft.com/office/drawing/2010/main">
+        <mc:Choice Requires="a14">
           <p:sp>
             <p:nvSpPr>
               <p:cNvPr id="2" name="TextBox 1">
@@ -10157,7 +10008,7 @@
             </p:txBody>
           </p:sp>
         </mc:Choice>
-        <mc:Fallback>
+        <mc:Fallback xmlns="">
           <p:sp>
             <p:nvSpPr>
               <p:cNvPr id="2" name="TextBox 1">
@@ -10245,6 +10096,196 @@
 </p:sld>
 </file>
 
+<file path=ppt/slides/slide23.xml><?xml version="1.0" encoding="utf-8"?>
+<p:sld xmlns:a="http://schemas.openxmlformats.org/drawingml/2006/main" xmlns:r="http://schemas.openxmlformats.org/officeDocument/2006/relationships" xmlns:p="http://schemas.openxmlformats.org/presentationml/2006/main">
+  <p:cSld>
+    <p:spTree>
+      <p:nvGrpSpPr>
+        <p:cNvPr id="1" name=""/>
+        <p:cNvGrpSpPr/>
+        <p:nvPr/>
+      </p:nvGrpSpPr>
+      <p:grpSpPr>
+        <a:xfrm>
+          <a:off x="0" y="0"/>
+          <a:ext cx="0" cy="0"/>
+          <a:chOff x="0" y="0"/>
+          <a:chExt cx="0" cy="0"/>
+        </a:xfrm>
+      </p:grpSpPr>
+      <p:sp>
+        <p:nvSpPr>
+          <p:cNvPr id="3" name="Title 2">
+            <a:extLst>
+              <a:ext uri="{FF2B5EF4-FFF2-40B4-BE49-F238E27FC236}">
+                <a16:creationId xmlns:a16="http://schemas.microsoft.com/office/drawing/2014/main" id="{B6638231-D78E-9046-971E-9007915E5526}"/>
+              </a:ext>
+            </a:extLst>
+          </p:cNvPr>
+          <p:cNvSpPr>
+            <a:spLocks noGrp="1"/>
+          </p:cNvSpPr>
+          <p:nvPr>
+            <p:ph type="title"/>
+          </p:nvPr>
+        </p:nvSpPr>
+        <p:spPr/>
+        <p:txBody>
+          <a:bodyPr/>
+          <a:lstStyle/>
+          <a:p>
+            <a:r>
+              <a:rPr lang="en-US" dirty="0"/>
+              <a:t>t-</a:t>
+            </a:r>
+            <a:r>
+              <a:rPr lang="ru-RU" dirty="0"/>
+              <a:t>тест</a:t>
+            </a:r>
+            <a:endParaRPr lang="en-US" dirty="0"/>
+          </a:p>
+        </p:txBody>
+      </p:sp>
+      <p:sp>
+        <p:nvSpPr>
+          <p:cNvPr id="2" name="TextBox 1">
+            <a:extLst>
+              <a:ext uri="{FF2B5EF4-FFF2-40B4-BE49-F238E27FC236}">
+                <a16:creationId xmlns:a16="http://schemas.microsoft.com/office/drawing/2014/main" id="{FC44FC2E-21C5-5B45-A8E8-3551A7FD8C01}"/>
+              </a:ext>
+            </a:extLst>
+          </p:cNvPr>
+          <p:cNvSpPr txBox="1"/>
+          <p:nvPr/>
+        </p:nvSpPr>
+        <p:spPr>
+          <a:xfrm>
+            <a:off x="500550" y="1200150"/>
+            <a:ext cx="8411550" cy="3323987"/>
+          </a:xfrm>
+          <a:prstGeom prst="rect">
+            <a:avLst/>
+          </a:prstGeom>
+          <a:noFill/>
+        </p:spPr>
+        <p:txBody>
+          <a:bodyPr wrap="square" rtlCol="0">
+            <a:spAutoFit/>
+          </a:bodyPr>
+          <a:lstStyle/>
+          <a:p>
+            <a:pPr>
+              <a:spcAft>
+                <a:spcPts val="1200"/>
+              </a:spcAft>
+            </a:pPr>
+            <a:r>
+              <a:rPr lang="ru-RU" dirty="0"/>
+              <a:t>Статистический тест, который используется для проверки гипотезы о равенстве средних значений одной или нескольких групп, когда дисперсия неизвестна, и выборка мала. </a:t>
+            </a:r>
+          </a:p>
+          <a:p>
+            <a:pPr marL="285750" indent="-285750">
+              <a:spcAft>
+                <a:spcPts val="1200"/>
+              </a:spcAft>
+              <a:buFont typeface="Arial" panose="020B0604020202020204" pitchFamily="34" charset="0"/>
+              <a:buChar char="•"/>
+            </a:pPr>
+            <a:r>
+              <a:rPr lang="ru-RU" dirty="0" err="1"/>
+              <a:t>Одновыборочный</a:t>
+            </a:r>
+            <a:r>
+              <a:rPr lang="ru-RU" dirty="0"/>
+              <a:t> </a:t>
+            </a:r>
+            <a:r>
+              <a:rPr lang="en-US" dirty="0"/>
+              <a:t>t-</a:t>
+            </a:r>
+            <a:r>
+              <a:rPr lang="ru-RU" dirty="0"/>
+              <a:t>тест</a:t>
+            </a:r>
+            <a:r>
+              <a:rPr lang="en-US" dirty="0"/>
+              <a:t>:</a:t>
+            </a:r>
+            <a:r>
+              <a:rPr lang="ru-RU" dirty="0"/>
+              <a:t> Проверяет гипотезу о том, что среднее значение выборки равно известному значению.</a:t>
+            </a:r>
+          </a:p>
+          <a:p>
+            <a:pPr marL="285750" indent="-285750">
+              <a:spcAft>
+                <a:spcPts val="1200"/>
+              </a:spcAft>
+              <a:buFont typeface="Arial" panose="020B0604020202020204" pitchFamily="34" charset="0"/>
+              <a:buChar char="•"/>
+            </a:pPr>
+            <a:r>
+              <a:rPr lang="en-US" dirty="0"/>
+              <a:t>t-</a:t>
+            </a:r>
+            <a:r>
+              <a:rPr lang="ru-RU" dirty="0"/>
+              <a:t>тест для независимых выборок</a:t>
+            </a:r>
+            <a:r>
+              <a:rPr lang="en-US" dirty="0"/>
+              <a:t>:</a:t>
+            </a:r>
+            <a:r>
+              <a:rPr lang="ru-RU" dirty="0"/>
+              <a:t> Сравнивает средние значения двух независимых групп. Тест используется для проверки гипотезы о том, что средние значения двух групп равны.</a:t>
+            </a:r>
+          </a:p>
+          <a:p>
+            <a:pPr marL="285750" indent="-285750">
+              <a:spcAft>
+                <a:spcPts val="1200"/>
+              </a:spcAft>
+              <a:buFont typeface="Arial" panose="020B0604020202020204" pitchFamily="34" charset="0"/>
+              <a:buChar char="•"/>
+            </a:pPr>
+            <a:r>
+              <a:rPr lang="ru-RU" dirty="0"/>
+              <a:t>Парный </a:t>
+            </a:r>
+            <a:r>
+              <a:rPr lang="en-US" dirty="0"/>
+              <a:t>t-</a:t>
+            </a:r>
+            <a:r>
+              <a:rPr lang="ru-RU" dirty="0"/>
+              <a:t>тест</a:t>
+            </a:r>
+            <a:r>
+              <a:rPr lang="en-US" dirty="0"/>
+              <a:t>:</a:t>
+            </a:r>
+            <a:r>
+              <a:rPr lang="ru-RU" dirty="0"/>
+              <a:t> Сравнивает средние значения двух зависимых выборок (обычно это данные до и после эксперимента для одной группы).</a:t>
+            </a:r>
+          </a:p>
+        </p:txBody>
+      </p:sp>
+    </p:spTree>
+    <p:extLst>
+      <p:ext uri="{BB962C8B-B14F-4D97-AF65-F5344CB8AC3E}">
+        <p14:creationId xmlns:p14="http://schemas.microsoft.com/office/powerpoint/2010/main" val="3406493039"/>
+      </p:ext>
+    </p:extLst>
+  </p:cSld>
+  <p:clrMapOvr>
+    <a:masterClrMapping/>
+  </p:clrMapOvr>
+</p:sld>
+</file>
+
 <file path=ppt/slides/slide24.xml><?xml version="1.0" encoding="utf-8"?>
 <p:sld xmlns:a="http://schemas.openxmlformats.org/drawingml/2006/main" xmlns:r="http://schemas.openxmlformats.org/officeDocument/2006/relationships" xmlns:p="http://schemas.openxmlformats.org/presentationml/2006/main">
   <p:cSld>
@@ -10289,7 +10330,7 @@
             </a:r>
             <a:r>
               <a:rPr lang="ru-RU" dirty="0"/>
-              <a:t>тест</a:t>
+              <a:t>тест условия применения</a:t>
             </a:r>
             <a:endParaRPr lang="en-US" dirty="0"/>
           </a:p>
@@ -10310,7 +10351,7 @@
         <p:spPr>
           <a:xfrm>
             <a:off x="500550" y="1200150"/>
-            <a:ext cx="8411550" cy="3323987"/>
+            <a:ext cx="8411550" cy="3447098"/>
           </a:xfrm>
           <a:prstGeom prst="rect">
             <a:avLst/>
@@ -10329,25 +10370,35 @@
               </a:spcAft>
             </a:pPr>
             <a:r>
+              <a:rPr lang="ru-RU" b="1" dirty="0"/>
+              <a:t>Нормальность распределения:</a:t>
+            </a:r>
+            <a:r>
               <a:rPr lang="ru-RU" dirty="0"/>
-              <a:t>Статистический тест, который используется для проверки гипотезы о равенстве средних значений одной или нескольких групп, когда дисперсия неизвестна, и выборка мала. </a:t>
-            </a:r>
-          </a:p>
-          <a:p>
-            <a:pPr marL="285750" indent="-285750">
+              <a:t> Данные в выборке должны быть нормально распределены, особенно для малых выборок (обычно менее 30 наблюдений). Вспоминаем про тесты на нормальность: тест Шапиро-</a:t>
+            </a:r>
+            <a:r>
+              <a:rPr lang="ru-RU" dirty="0" err="1"/>
+              <a:t>Уилка</a:t>
+            </a:r>
+            <a:r>
+              <a:rPr lang="ru-RU" dirty="0"/>
+              <a:t>, Колмогорова-Смирнова. Если данные распределены не нормально – тест Манна-Уитни.</a:t>
+            </a:r>
+          </a:p>
+          <a:p>
+            <a:pPr>
               <a:spcAft>
                 <a:spcPts val="1200"/>
               </a:spcAft>
-              <a:buFont typeface="Arial" panose="020B0604020202020204" pitchFamily="34" charset="0"/>
-              <a:buChar char="•"/>
             </a:pPr>
             <a:r>
-              <a:rPr lang="ru-RU" dirty="0" err="1"/>
-              <a:t>Одновыборочный</a:t>
+              <a:rPr lang="ru-RU" b="1" dirty="0"/>
+              <a:t>Гомоскедастичность (равенство дисперсий):</a:t>
             </a:r>
             <a:r>
               <a:rPr lang="ru-RU" dirty="0"/>
-              <a:t> </a:t>
+              <a:t> Для независимых выборок предполагается, что дисперсии в двух группах должны быть равны. Если дисперсии не равны, следует использовать модифицированный тест — </a:t>
             </a:r>
             <a:r>
               <a:rPr lang="en-US" dirty="0"/>
@@ -10355,69 +10406,30 @@
             </a:r>
             <a:r>
               <a:rPr lang="ru-RU" dirty="0"/>
-              <a:t>тест</a:t>
-            </a:r>
-            <a:r>
-              <a:rPr lang="en-US" dirty="0"/>
-              <a:t>:</a:t>
-            </a:r>
-            <a:r>
-              <a:rPr lang="ru-RU" dirty="0"/>
-              <a:t> Проверяет гипотезу о том, что среднее значение выборки равно известному значению.</a:t>
-            </a:r>
-          </a:p>
-          <a:p>
-            <a:pPr marL="285750" indent="-285750">
+              <a:t>тест с поправкой на неравные дисперсии (тест Уэлча).</a:t>
+            </a:r>
+          </a:p>
+          <a:p>
+            <a:pPr>
               <a:spcAft>
                 <a:spcPts val="1200"/>
               </a:spcAft>
-              <a:buFont typeface="Arial" panose="020B0604020202020204" pitchFamily="34" charset="0"/>
-              <a:buChar char="•"/>
             </a:pPr>
+            <a:r>
+              <a:rPr lang="ru-RU" b="1" dirty="0"/>
+              <a:t>Независимость наблюдений:</a:t>
+            </a:r>
+            <a:r>
+              <a:rPr lang="ru-RU" dirty="0"/>
+              <a:t> В выборках должны быть независимые наблюдения. Если выборки зависимы (например, до и после измерения на одной и той же группе людей), используется парный </a:t>
+            </a:r>
             <a:r>
               <a:rPr lang="en-US" dirty="0"/>
               <a:t>t-</a:t>
             </a:r>
             <a:r>
               <a:rPr lang="ru-RU" dirty="0"/>
-              <a:t>тест для независимых выборок</a:t>
-            </a:r>
-            <a:r>
-              <a:rPr lang="en-US" dirty="0"/>
-              <a:t>:</a:t>
-            </a:r>
-            <a:r>
-              <a:rPr lang="ru-RU" dirty="0"/>
-              <a:t> Сравнивает средние значения двух независимых групп. Тест используется для проверки гипотезы о том, что средние значения двух групп равны.</a:t>
-            </a:r>
-          </a:p>
-          <a:p>
-            <a:pPr marL="285750" indent="-285750">
-              <a:spcAft>
-                <a:spcPts val="1200"/>
-              </a:spcAft>
-              <a:buFont typeface="Arial" panose="020B0604020202020204" pitchFamily="34" charset="0"/>
-              <a:buChar char="•"/>
-            </a:pPr>
-            <a:r>
-              <a:rPr lang="ru-RU" dirty="0"/>
-              <a:t>Парный </a:t>
-            </a:r>
-            <a:r>
-              <a:rPr lang="en-US" dirty="0"/>
-              <a:t>t-</a:t>
-            </a:r>
-            <a:r>
-              <a:rPr lang="ru-RU" dirty="0"/>
-              <a:t>тест</a:t>
-            </a:r>
-            <a:r>
-              <a:rPr lang="en-US" dirty="0"/>
-              <a:t>:</a:t>
-            </a:r>
-            <a:r>
-              <a:rPr lang="ru-RU" dirty="0"/>
-              <a:t> Сравнивает средние значения двух зависимых выборок (обычно это данные до и после эксперимента для одной группы).</a:t>
+              <a:t>тест.</a:t>
             </a:r>
           </a:p>
         </p:txBody>
@@ -10425,7 +10437,7 @@
     </p:spTree>
     <p:extLst>
       <p:ext uri="{BB962C8B-B14F-4D97-AF65-F5344CB8AC3E}">
-        <p14:creationId xmlns:p14="http://schemas.microsoft.com/office/powerpoint/2010/main" val="3406493039"/>
+        <p14:creationId xmlns:p14="http://schemas.microsoft.com/office/powerpoint/2010/main" val="1429888990"/>
       </p:ext>
     </p:extLst>
   </p:cSld>
@@ -10479,175 +10491,14 @@
             </a:r>
             <a:r>
               <a:rPr lang="ru-RU" dirty="0"/>
-              <a:t>тест условия применения</a:t>
+              <a:t>тест</a:t>
             </a:r>
             <a:endParaRPr lang="en-US" dirty="0"/>
           </a:p>
         </p:txBody>
       </p:sp>
-      <p:sp>
-        <p:nvSpPr>
-          <p:cNvPr id="2" name="TextBox 1">
-            <a:extLst>
-              <a:ext uri="{FF2B5EF4-FFF2-40B4-BE49-F238E27FC236}">
-                <a16:creationId xmlns:a16="http://schemas.microsoft.com/office/drawing/2014/main" id="{FC44FC2E-21C5-5B45-A8E8-3551A7FD8C01}"/>
-              </a:ext>
-            </a:extLst>
-          </p:cNvPr>
-          <p:cNvSpPr txBox="1"/>
-          <p:nvPr/>
-        </p:nvSpPr>
-        <p:spPr>
-          <a:xfrm>
-            <a:off x="500550" y="1200150"/>
-            <a:ext cx="8411550" cy="3447098"/>
-          </a:xfrm>
-          <a:prstGeom prst="rect">
-            <a:avLst/>
-          </a:prstGeom>
-          <a:noFill/>
-        </p:spPr>
-        <p:txBody>
-          <a:bodyPr wrap="square" rtlCol="0">
-            <a:spAutoFit/>
-          </a:bodyPr>
-          <a:lstStyle/>
-          <a:p>
-            <a:pPr>
-              <a:spcAft>
-                <a:spcPts val="1200"/>
-              </a:spcAft>
-            </a:pPr>
-            <a:r>
-              <a:rPr lang="ru-RU" b="1" dirty="0"/>
-              <a:t>Нормальность распределения:</a:t>
-            </a:r>
-            <a:r>
-              <a:rPr lang="ru-RU" dirty="0"/>
-              <a:t> Данные в выборке должны быть нормально распределены, особенно для малых выборок (обычно менее 30 наблюдений). Вспоминаем про тесты на нормальность: тест Шапиро-</a:t>
-            </a:r>
-            <a:r>
-              <a:rPr lang="ru-RU" dirty="0" err="1"/>
-              <a:t>Уилка</a:t>
-            </a:r>
-            <a:r>
-              <a:rPr lang="ru-RU" dirty="0"/>
-              <a:t>, Колмогорова-Смирнова. Если данные распределены не нормально – тест Манна-Уитни.</a:t>
-            </a:r>
-          </a:p>
-          <a:p>
-            <a:pPr>
-              <a:spcAft>
-                <a:spcPts val="1200"/>
-              </a:spcAft>
-            </a:pPr>
-            <a:r>
-              <a:rPr lang="ru-RU" b="1" dirty="0"/>
-              <a:t>Гомоскедастичность (равенство дисперсий):</a:t>
-            </a:r>
-            <a:r>
-              <a:rPr lang="ru-RU" dirty="0"/>
-              <a:t> Для независимых выборок предполагается, что дисперсии в двух группах должны быть равны. Если дисперсии не равны, следует использовать модифицированный тест — </a:t>
-            </a:r>
-            <a:r>
-              <a:rPr lang="en-US" dirty="0"/>
-              <a:t>t-</a:t>
-            </a:r>
-            <a:r>
-              <a:rPr lang="ru-RU" dirty="0"/>
-              <a:t>тест с поправкой на неравные дисперсии (тест Уэлча).</a:t>
-            </a:r>
-          </a:p>
-          <a:p>
-            <a:pPr>
-              <a:spcAft>
-                <a:spcPts val="1200"/>
-              </a:spcAft>
-            </a:pPr>
-            <a:r>
-              <a:rPr lang="ru-RU" b="1" dirty="0"/>
-              <a:t>Независимость наблюдений:</a:t>
-            </a:r>
-            <a:r>
-              <a:rPr lang="ru-RU" dirty="0"/>
-              <a:t> В выборках должны быть независимые наблюдения. Если выборки зависимы (например, до и после измерения на одной и той же группе людей), используется парный </a:t>
-            </a:r>
-            <a:r>
-              <a:rPr lang="en-US" dirty="0"/>
-              <a:t>t-</a:t>
-            </a:r>
-            <a:r>
-              <a:rPr lang="ru-RU" dirty="0"/>
-              <a:t>тест.</a:t>
-            </a:r>
-          </a:p>
-        </p:txBody>
-      </p:sp>
-    </p:spTree>
-    <p:extLst>
-      <p:ext uri="{BB962C8B-B14F-4D97-AF65-F5344CB8AC3E}">
-        <p14:creationId xmlns:p14="http://schemas.microsoft.com/office/powerpoint/2010/main" val="1429888990"/>
-      </p:ext>
-    </p:extLst>
-  </p:cSld>
-  <p:clrMapOvr>
-    <a:masterClrMapping/>
-  </p:clrMapOvr>
-</p:sld>
-</file>
-
-<file path=ppt/slides/slide26.xml><?xml version="1.0" encoding="utf-8"?>
-<p:sld xmlns:a="http://schemas.openxmlformats.org/drawingml/2006/main" xmlns:r="http://schemas.openxmlformats.org/officeDocument/2006/relationships" xmlns:p="http://schemas.openxmlformats.org/presentationml/2006/main">
-  <p:cSld>
-    <p:spTree>
-      <p:nvGrpSpPr>
-        <p:cNvPr id="1" name=""/>
-        <p:cNvGrpSpPr/>
-        <p:nvPr/>
-      </p:nvGrpSpPr>
-      <p:grpSpPr>
-        <a:xfrm>
-          <a:off x="0" y="0"/>
-          <a:ext cx="0" cy="0"/>
-          <a:chOff x="0" y="0"/>
-          <a:chExt cx="0" cy="0"/>
-        </a:xfrm>
-      </p:grpSpPr>
-      <p:sp>
-        <p:nvSpPr>
-          <p:cNvPr id="3" name="Title 2">
-            <a:extLst>
-              <a:ext uri="{FF2B5EF4-FFF2-40B4-BE49-F238E27FC236}">
-                <a16:creationId xmlns:a16="http://schemas.microsoft.com/office/drawing/2014/main" id="{B6638231-D78E-9046-971E-9007915E5526}"/>
-              </a:ext>
-            </a:extLst>
-          </p:cNvPr>
-          <p:cNvSpPr>
-            <a:spLocks noGrp="1"/>
-          </p:cNvSpPr>
-          <p:nvPr>
-            <p:ph type="title"/>
-          </p:nvPr>
-        </p:nvSpPr>
-        <p:spPr/>
-        <p:txBody>
-          <a:bodyPr/>
-          <a:lstStyle/>
-          <a:p>
-            <a:r>
-              <a:rPr lang="en-US" dirty="0"/>
-              <a:t>t-</a:t>
-            </a:r>
-            <a:r>
-              <a:rPr lang="ru-RU" dirty="0"/>
-              <a:t>тест</a:t>
-            </a:r>
-            <a:endParaRPr lang="en-US" dirty="0"/>
-          </a:p>
-        </p:txBody>
-      </p:sp>
-      <mc:AlternateContent xmlns:mc="http://schemas.openxmlformats.org/markup-compatibility/2006">
-        <mc:Choice xmlns:a14="http://schemas.microsoft.com/office/drawing/2010/main" Requires="a14">
+      <mc:AlternateContent xmlns:mc="http://schemas.openxmlformats.org/markup-compatibility/2006" xmlns:a14="http://schemas.microsoft.com/office/drawing/2010/main">
+        <mc:Choice Requires="a14">
           <p:sp>
             <p:nvSpPr>
               <p:cNvPr id="2" name="TextBox 1">
@@ -11110,7 +10961,7 @@
             </p:txBody>
           </p:sp>
         </mc:Choice>
-        <mc:Fallback>
+        <mc:Fallback xmlns="">
           <p:sp>
             <p:nvSpPr>
               <p:cNvPr id="2" name="TextBox 1">
@@ -11155,8 +11006,8 @@
           </p:sp>
         </mc:Fallback>
       </mc:AlternateContent>
-      <mc:AlternateContent xmlns:mc="http://schemas.openxmlformats.org/markup-compatibility/2006">
-        <mc:Choice xmlns:a14="http://schemas.microsoft.com/office/drawing/2010/main" Requires="a14">
+      <mc:AlternateContent xmlns:mc="http://schemas.openxmlformats.org/markup-compatibility/2006" xmlns:a14="http://schemas.microsoft.com/office/drawing/2010/main">
+        <mc:Choice Requires="a14">
           <p:sp>
             <p:nvSpPr>
               <p:cNvPr id="5" name="TextBox 4">
@@ -11493,7 +11344,7 @@
             </p:txBody>
           </p:sp>
         </mc:Choice>
-        <mc:Fallback>
+        <mc:Fallback xmlns="">
           <p:sp>
             <p:nvSpPr>
               <p:cNvPr id="5" name="TextBox 4">
@@ -11551,6 +11402,160 @@
 </p:sld>
 </file>
 
+<file path=ppt/slides/slide26.xml><?xml version="1.0" encoding="utf-8"?>
+<p:sld xmlns:a="http://schemas.openxmlformats.org/drawingml/2006/main" xmlns:r="http://schemas.openxmlformats.org/officeDocument/2006/relationships" xmlns:p="http://schemas.openxmlformats.org/presentationml/2006/main">
+  <p:cSld>
+    <p:spTree>
+      <p:nvGrpSpPr>
+        <p:cNvPr id="1" name=""/>
+        <p:cNvGrpSpPr/>
+        <p:nvPr/>
+      </p:nvGrpSpPr>
+      <p:grpSpPr>
+        <a:xfrm>
+          <a:off x="0" y="0"/>
+          <a:ext cx="0" cy="0"/>
+          <a:chOff x="0" y="0"/>
+          <a:chExt cx="0" cy="0"/>
+        </a:xfrm>
+      </p:grpSpPr>
+      <p:sp>
+        <p:nvSpPr>
+          <p:cNvPr id="3" name="Title 2">
+            <a:extLst>
+              <a:ext uri="{FF2B5EF4-FFF2-40B4-BE49-F238E27FC236}">
+                <a16:creationId xmlns:a16="http://schemas.microsoft.com/office/drawing/2014/main" id="{B6638231-D78E-9046-971E-9007915E5526}"/>
+              </a:ext>
+            </a:extLst>
+          </p:cNvPr>
+          <p:cNvSpPr>
+            <a:spLocks noGrp="1"/>
+          </p:cNvSpPr>
+          <p:nvPr>
+            <p:ph type="title"/>
+          </p:nvPr>
+        </p:nvSpPr>
+        <p:spPr/>
+        <p:txBody>
+          <a:bodyPr/>
+          <a:lstStyle/>
+          <a:p>
+            <a:r>
+              <a:rPr lang="en-US" dirty="0"/>
+              <a:t>t-</a:t>
+            </a:r>
+            <a:r>
+              <a:rPr lang="ru-RU" dirty="0"/>
+              <a:t>тест</a:t>
+            </a:r>
+            <a:r>
+              <a:rPr lang="en-US" dirty="0"/>
+              <a:t> </a:t>
+            </a:r>
+            <a:r>
+              <a:rPr lang="ru-RU" dirty="0"/>
+              <a:t>интерпретация</a:t>
+            </a:r>
+            <a:endParaRPr lang="en-US" dirty="0"/>
+          </a:p>
+        </p:txBody>
+      </p:sp>
+      <p:sp>
+        <p:nvSpPr>
+          <p:cNvPr id="2" name="TextBox 1">
+            <a:extLst>
+              <a:ext uri="{FF2B5EF4-FFF2-40B4-BE49-F238E27FC236}">
+                <a16:creationId xmlns:a16="http://schemas.microsoft.com/office/drawing/2014/main" id="{FC44FC2E-21C5-5B45-A8E8-3551A7FD8C01}"/>
+              </a:ext>
+            </a:extLst>
+          </p:cNvPr>
+          <p:cNvSpPr txBox="1"/>
+          <p:nvPr/>
+        </p:nvSpPr>
+        <p:spPr>
+          <a:xfrm>
+            <a:off x="500550" y="1558007"/>
+            <a:ext cx="8411550" cy="2185214"/>
+          </a:xfrm>
+          <a:prstGeom prst="rect">
+            <a:avLst/>
+          </a:prstGeom>
+          <a:noFill/>
+        </p:spPr>
+        <p:txBody>
+          <a:bodyPr wrap="square" rtlCol="0">
+            <a:spAutoFit/>
+          </a:bodyPr>
+          <a:lstStyle/>
+          <a:p>
+            <a:pPr>
+              <a:spcAft>
+                <a:spcPts val="1200"/>
+              </a:spcAft>
+            </a:pPr>
+            <a:r>
+              <a:rPr lang="en-US" b="1" dirty="0"/>
+              <a:t>t-</a:t>
+            </a:r>
+            <a:r>
+              <a:rPr lang="ru-RU" b="1" dirty="0"/>
+              <a:t>статистика: </a:t>
+            </a:r>
+            <a:r>
+              <a:rPr lang="ru-RU" dirty="0"/>
+              <a:t>Это значение указывает, насколько разница между средними значениями двух групп велика относительно разброса данных. Чем больше </a:t>
+            </a:r>
+            <a:r>
+              <a:rPr lang="en-US" dirty="0"/>
+              <a:t>t-</a:t>
+            </a:r>
+            <a:r>
+              <a:rPr lang="ru-RU" dirty="0"/>
+              <a:t>статистика, тем больше вероятность, что разница значима.</a:t>
+            </a:r>
+          </a:p>
+          <a:p>
+            <a:pPr>
+              <a:spcAft>
+                <a:spcPts val="1200"/>
+              </a:spcAft>
+            </a:pPr>
+            <a:r>
+              <a:rPr lang="en-US" b="1" dirty="0"/>
+              <a:t>p-</a:t>
+            </a:r>
+            <a:r>
+              <a:rPr lang="ru-RU" b="1" dirty="0"/>
+              <a:t>значение: </a:t>
+            </a:r>
+            <a:r>
+              <a:rPr lang="ru-RU" dirty="0"/>
+              <a:t>Это вероятность получить такие данные (или более экстремальные) при условии, что нулевая гипотеза верна. Если </a:t>
+            </a:r>
+            <a:r>
+              <a:rPr lang="en-US" dirty="0"/>
+              <a:t>p-</a:t>
+            </a:r>
+            <a:r>
+              <a:rPr lang="ru-RU" dirty="0"/>
+              <a:t>значение меньше уровня значимости (например, 0.05), то нулевая гипотеза отвергается, что говорит о значимых различиях между группами.</a:t>
+            </a:r>
+          </a:p>
+        </p:txBody>
+      </p:sp>
+    </p:spTree>
+    <p:extLst>
+      <p:ext uri="{BB962C8B-B14F-4D97-AF65-F5344CB8AC3E}">
+        <p14:creationId xmlns:p14="http://schemas.microsoft.com/office/powerpoint/2010/main" val="3388795871"/>
+      </p:ext>
+    </p:extLst>
+  </p:cSld>
+  <p:clrMapOvr>
+    <a:masterClrMapping/>
+  </p:clrMapOvr>
+</p:sld>
+</file>
+
 <file path=ppt/slides/slide27.xml><?xml version="1.0" encoding="utf-8"?>
 <p:sld xmlns:a="http://schemas.openxmlformats.org/drawingml/2006/main" xmlns:r="http://schemas.openxmlformats.org/officeDocument/2006/relationships" xmlns:p="http://schemas.openxmlformats.org/presentationml/2006/main">
   <p:cSld>
@@ -11603,160 +11608,6 @@
             </a:r>
             <a:r>
               <a:rPr lang="ru-RU" dirty="0"/>
-              <a:t>интерпретация</a:t>
-            </a:r>
-            <a:endParaRPr lang="en-US" dirty="0"/>
-          </a:p>
-        </p:txBody>
-      </p:sp>
-      <p:sp>
-        <p:nvSpPr>
-          <p:cNvPr id="2" name="TextBox 1">
-            <a:extLst>
-              <a:ext uri="{FF2B5EF4-FFF2-40B4-BE49-F238E27FC236}">
-                <a16:creationId xmlns:a16="http://schemas.microsoft.com/office/drawing/2014/main" id="{FC44FC2E-21C5-5B45-A8E8-3551A7FD8C01}"/>
-              </a:ext>
-            </a:extLst>
-          </p:cNvPr>
-          <p:cNvSpPr txBox="1"/>
-          <p:nvPr/>
-        </p:nvSpPr>
-        <p:spPr>
-          <a:xfrm>
-            <a:off x="500550" y="1558007"/>
-            <a:ext cx="8411550" cy="2185214"/>
-          </a:xfrm>
-          <a:prstGeom prst="rect">
-            <a:avLst/>
-          </a:prstGeom>
-          <a:noFill/>
-        </p:spPr>
-        <p:txBody>
-          <a:bodyPr wrap="square" rtlCol="0">
-            <a:spAutoFit/>
-          </a:bodyPr>
-          <a:lstStyle/>
-          <a:p>
-            <a:pPr>
-              <a:spcAft>
-                <a:spcPts val="1200"/>
-              </a:spcAft>
-            </a:pPr>
-            <a:r>
-              <a:rPr lang="en-US" b="1" dirty="0"/>
-              <a:t>t-</a:t>
-            </a:r>
-            <a:r>
-              <a:rPr lang="ru-RU" b="1" dirty="0"/>
-              <a:t>статистика: </a:t>
-            </a:r>
-            <a:r>
-              <a:rPr lang="ru-RU" dirty="0"/>
-              <a:t>Это значение указывает, насколько разница между средними значениями двух групп велика относительно разброса данных. Чем больше </a:t>
-            </a:r>
-            <a:r>
-              <a:rPr lang="en-US" dirty="0"/>
-              <a:t>t-</a:t>
-            </a:r>
-            <a:r>
-              <a:rPr lang="ru-RU" dirty="0"/>
-              <a:t>статистика, тем больше вероятность, что разница значима.</a:t>
-            </a:r>
-          </a:p>
-          <a:p>
-            <a:pPr>
-              <a:spcAft>
-                <a:spcPts val="1200"/>
-              </a:spcAft>
-            </a:pPr>
-            <a:r>
-              <a:rPr lang="en-US" b="1" dirty="0"/>
-              <a:t>p-</a:t>
-            </a:r>
-            <a:r>
-              <a:rPr lang="ru-RU" b="1" dirty="0"/>
-              <a:t>значение: </a:t>
-            </a:r>
-            <a:r>
-              <a:rPr lang="ru-RU" dirty="0"/>
-              <a:t>Это вероятность получить такие данные (или более экстремальные) при условии, что нулевая гипотеза верна. Если </a:t>
-            </a:r>
-            <a:r>
-              <a:rPr lang="en-US" dirty="0"/>
-              <a:t>p-</a:t>
-            </a:r>
-            <a:r>
-              <a:rPr lang="ru-RU" dirty="0"/>
-              <a:t>значение меньше уровня значимости (например, 0.05), то нулевая гипотеза отвергается, что говорит о значимых различиях между группами.</a:t>
-            </a:r>
-          </a:p>
-        </p:txBody>
-      </p:sp>
-    </p:spTree>
-    <p:extLst>
-      <p:ext uri="{BB962C8B-B14F-4D97-AF65-F5344CB8AC3E}">
-        <p14:creationId xmlns:p14="http://schemas.microsoft.com/office/powerpoint/2010/main" val="3388795871"/>
-      </p:ext>
-    </p:extLst>
-  </p:cSld>
-  <p:clrMapOvr>
-    <a:masterClrMapping/>
-  </p:clrMapOvr>
-</p:sld>
-</file>
-
-<file path=ppt/slides/slide28.xml><?xml version="1.0" encoding="utf-8"?>
-<p:sld xmlns:a="http://schemas.openxmlformats.org/drawingml/2006/main" xmlns:r="http://schemas.openxmlformats.org/officeDocument/2006/relationships" xmlns:p="http://schemas.openxmlformats.org/presentationml/2006/main">
-  <p:cSld>
-    <p:spTree>
-      <p:nvGrpSpPr>
-        <p:cNvPr id="1" name=""/>
-        <p:cNvGrpSpPr/>
-        <p:nvPr/>
-      </p:nvGrpSpPr>
-      <p:grpSpPr>
-        <a:xfrm>
-          <a:off x="0" y="0"/>
-          <a:ext cx="0" cy="0"/>
-          <a:chOff x="0" y="0"/>
-          <a:chExt cx="0" cy="0"/>
-        </a:xfrm>
-      </p:grpSpPr>
-      <p:sp>
-        <p:nvSpPr>
-          <p:cNvPr id="3" name="Title 2">
-            <a:extLst>
-              <a:ext uri="{FF2B5EF4-FFF2-40B4-BE49-F238E27FC236}">
-                <a16:creationId xmlns:a16="http://schemas.microsoft.com/office/drawing/2014/main" id="{B6638231-D78E-9046-971E-9007915E5526}"/>
-              </a:ext>
-            </a:extLst>
-          </p:cNvPr>
-          <p:cNvSpPr>
-            <a:spLocks noGrp="1"/>
-          </p:cNvSpPr>
-          <p:nvPr>
-            <p:ph type="title"/>
-          </p:nvPr>
-        </p:nvSpPr>
-        <p:spPr/>
-        <p:txBody>
-          <a:bodyPr/>
-          <a:lstStyle/>
-          <a:p>
-            <a:r>
-              <a:rPr lang="en-US" dirty="0"/>
-              <a:t>t-</a:t>
-            </a:r>
-            <a:r>
-              <a:rPr lang="ru-RU" dirty="0"/>
-              <a:t>тест</a:t>
-            </a:r>
-            <a:r>
-              <a:rPr lang="en-US" dirty="0"/>
-              <a:t> </a:t>
-            </a:r>
-            <a:r>
-              <a:rPr lang="ru-RU" dirty="0"/>
               <a:t>размер выборки</a:t>
             </a:r>
             <a:endParaRPr lang="en-US" dirty="0"/>
@@ -11780,7 +11631,7 @@
             <p:spPr>
               <a:xfrm>
                 <a:off x="488109" y="1352550"/>
-                <a:ext cx="8411550" cy="3632469"/>
+                <a:ext cx="8411550" cy="3712363"/>
               </a:xfrm>
               <a:prstGeom prst="rect">
                 <a:avLst/>
@@ -11950,7 +11801,7 @@
                                         <a:rPr lang="en-US" b="0" i="1" smtClean="0">
                                           <a:latin typeface="Cambria Math" panose="02040503050406030204" pitchFamily="18" charset="0"/>
                                         </a:rPr>
-                                        <m:t>𝑑</m:t>
+                                        <m:t>𝛿</m:t>
                                       </m:r>
                                     </m:num>
                                     <m:den>
@@ -12271,7 +12122,7 @@
                       <a:rPr lang="en-US" b="0" i="1" smtClean="0">
                         <a:latin typeface="Cambria Math" panose="02040503050406030204" pitchFamily="18" charset="0"/>
                       </a:rPr>
-                      <m:t>𝑑</m:t>
+                      <m:t>𝛿</m:t>
                     </m:r>
                   </m:oMath>
                 </a14:m>
@@ -12331,7 +12182,7 @@
             <p:spPr>
               <a:xfrm>
                 <a:off x="488109" y="1352550"/>
-                <a:ext cx="8411550" cy="3632469"/>
+                <a:ext cx="8411550" cy="3712363"/>
               </a:xfrm>
               <a:prstGeom prst="rect">
                 <a:avLst/>
@@ -12339,7 +12190,7 @@
               <a:blipFill>
                 <a:blip r:embed="rId2"/>
                 <a:stretch>
-                  <a:fillRect l="-603" t="-697" r="-1207" b="-1742"/>
+                  <a:fillRect l="-603" t="-683" r="-1207"/>
                 </a:stretch>
               </a:blipFill>
             </p:spPr>
@@ -12371,7 +12222,7 @@
 </p:sld>
 </file>
 
-<file path=ppt/slides/slide29.xml><?xml version="1.0" encoding="utf-8"?>
+<file path=ppt/slides/slide28.xml><?xml version="1.0" encoding="utf-8"?>
 <p:sld xmlns:a="http://schemas.openxmlformats.org/drawingml/2006/main" xmlns:r="http://schemas.openxmlformats.org/officeDocument/2006/relationships" xmlns:p="http://schemas.openxmlformats.org/presentationml/2006/main">
   <p:cSld>
     <p:spTree>
@@ -12421,8 +12272,8 @@
           </a:p>
         </p:txBody>
       </p:sp>
-      <mc:AlternateContent xmlns:mc="http://schemas.openxmlformats.org/markup-compatibility/2006">
-        <mc:Choice xmlns:a14="http://schemas.microsoft.com/office/drawing/2010/main" Requires="a14">
+      <mc:AlternateContent xmlns:mc="http://schemas.openxmlformats.org/markup-compatibility/2006" xmlns:a14="http://schemas.microsoft.com/office/drawing/2010/main">
+        <mc:Choice Requires="a14">
           <p:sp>
             <p:nvSpPr>
               <p:cNvPr id="2" name="TextBox 1">
@@ -12601,7 +12452,7 @@
             </p:txBody>
           </p:sp>
         </mc:Choice>
-        <mc:Fallback>
+        <mc:Fallback xmlns="">
           <p:sp>
             <p:nvSpPr>
               <p:cNvPr id="2" name="TextBox 1">
@@ -12659,693 +12510,7 @@
 </p:sld>
 </file>
 
-<file path=ppt/slides/slide3.xml><?xml version="1.0" encoding="utf-8"?>
-<p:sld xmlns:a="http://schemas.openxmlformats.org/drawingml/2006/main" xmlns:r="http://schemas.openxmlformats.org/officeDocument/2006/relationships" xmlns:p="http://schemas.openxmlformats.org/presentationml/2006/main">
-  <p:cSld>
-    <p:spTree>
-      <p:nvGrpSpPr>
-        <p:cNvPr id="1" name="Shape 203"/>
-        <p:cNvGrpSpPr/>
-        <p:nvPr/>
-      </p:nvGrpSpPr>
-      <p:grpSpPr>
-        <a:xfrm>
-          <a:off x="0" y="0"/>
-          <a:ext cx="0" cy="0"/>
-          <a:chOff x="0" y="0"/>
-          <a:chExt cx="0" cy="0"/>
-        </a:xfrm>
-      </p:grpSpPr>
-      <p:sp>
-        <p:nvSpPr>
-          <p:cNvPr id="204" name="Google Shape;204;p48"/>
-          <p:cNvSpPr/>
-          <p:nvPr/>
-        </p:nvSpPr>
-        <p:spPr>
-          <a:xfrm>
-            <a:off x="630000" y="2703050"/>
-            <a:ext cx="1033800" cy="1983600"/>
-          </a:xfrm>
-          <a:prstGeom prst="rect">
-            <a:avLst/>
-          </a:prstGeom>
-          <a:solidFill>
-            <a:schemeClr val="accent6"/>
-          </a:solidFill>
-          <a:ln>
-            <a:noFill/>
-          </a:ln>
-        </p:spPr>
-        <p:txBody>
-          <a:bodyPr spcFirstLastPara="1" wrap="square" lIns="91425" tIns="91425" rIns="91425" bIns="91425" anchor="ctr" anchorCtr="0">
-            <a:noAutofit/>
-          </a:bodyPr>
-          <a:lstStyle/>
-          <a:p>
-            <a:pPr marL="0" lvl="0" indent="0" algn="l" rtl="0">
-              <a:spcBef>
-                <a:spcPts val="0"/>
-              </a:spcBef>
-              <a:spcAft>
-                <a:spcPts val="0"/>
-              </a:spcAft>
-              <a:buNone/>
-            </a:pPr>
-            <a:endParaRPr/>
-          </a:p>
-        </p:txBody>
-      </p:sp>
-      <p:sp>
-        <p:nvSpPr>
-          <p:cNvPr id="206" name="Google Shape;206;p48"/>
-          <p:cNvSpPr txBox="1">
-            <a:spLocks noGrp="1"/>
-          </p:cNvSpPr>
-          <p:nvPr>
-            <p:ph type="title"/>
-          </p:nvPr>
-        </p:nvSpPr>
-        <p:spPr>
-          <a:xfrm>
-            <a:off x="500550" y="821219"/>
-            <a:ext cx="8520600" cy="1032900"/>
-          </a:xfrm>
-          <a:prstGeom prst="rect">
-            <a:avLst/>
-          </a:prstGeom>
-        </p:spPr>
-        <p:txBody>
-          <a:bodyPr spcFirstLastPara="1" wrap="square" lIns="91425" tIns="91425" rIns="91425" bIns="91425" anchor="t" anchorCtr="0">
-            <a:noAutofit/>
-          </a:bodyPr>
-          <a:lstStyle/>
-          <a:p>
-            <a:pPr marL="0" lvl="0" indent="0" algn="l" rtl="0">
-              <a:spcBef>
-                <a:spcPts val="0"/>
-              </a:spcBef>
-              <a:spcAft>
-                <a:spcPts val="0"/>
-              </a:spcAft>
-              <a:buClr>
-                <a:schemeClr val="dk1"/>
-              </a:buClr>
-              <a:buSzPts val="1100"/>
-              <a:buFont typeface="Arial"/>
-              <a:buNone/>
-            </a:pPr>
-            <a:r>
-              <a:rPr lang="en-US" dirty="0"/>
-              <a:t>Python </a:t>
-            </a:r>
-            <a:r>
-              <a:rPr lang="ru-RU" dirty="0"/>
-              <a:t>для аналитики</a:t>
-            </a:r>
-            <a:br>
-              <a:rPr lang="en-US" dirty="0"/>
-            </a:br>
-            <a:r>
-              <a:rPr lang="ru-RU" sz="3200" b="1" dirty="0">
-                <a:latin typeface="Roboto"/>
-                <a:ea typeface="Roboto"/>
-                <a:cs typeface="Roboto"/>
-                <a:sym typeface="Roboto"/>
-              </a:rPr>
-              <a:t>А/Б тесты</a:t>
-            </a:r>
-            <a:endParaRPr dirty="0"/>
-          </a:p>
-        </p:txBody>
-      </p:sp>
-      <p:sp>
-        <p:nvSpPr>
-          <p:cNvPr id="207" name="Google Shape;207;p48"/>
-          <p:cNvSpPr txBox="1">
-            <a:spLocks noGrp="1"/>
-          </p:cNvSpPr>
-          <p:nvPr>
-            <p:ph type="subTitle" idx="1"/>
-          </p:nvPr>
-        </p:nvSpPr>
-        <p:spPr>
-          <a:xfrm>
-            <a:off x="500550" y="520133"/>
-            <a:ext cx="7796700" cy="356926"/>
-          </a:xfrm>
-          <a:prstGeom prst="rect">
-            <a:avLst/>
-          </a:prstGeom>
-        </p:spPr>
-        <p:txBody>
-          <a:bodyPr spcFirstLastPara="1" wrap="square" lIns="91425" tIns="91425" rIns="91425" bIns="91425" anchor="t" anchorCtr="0">
-            <a:normAutofit fontScale="92500" lnSpcReduction="20000"/>
-          </a:bodyPr>
-          <a:lstStyle/>
-          <a:p>
-            <a:pPr marL="0" lvl="0" indent="0" algn="l" rtl="0">
-              <a:spcBef>
-                <a:spcPts val="0"/>
-              </a:spcBef>
-              <a:spcAft>
-                <a:spcPts val="0"/>
-              </a:spcAft>
-              <a:buNone/>
-            </a:pPr>
-            <a:r>
-              <a:rPr lang="ru" dirty="0"/>
-              <a:t>Тема вебинара</a:t>
-            </a:r>
-            <a:endParaRPr dirty="0"/>
-          </a:p>
-        </p:txBody>
-      </p:sp>
-      <p:sp>
-        <p:nvSpPr>
-          <p:cNvPr id="208" name="Google Shape;208;p48"/>
-          <p:cNvSpPr txBox="1">
-            <a:spLocks noGrp="1"/>
-          </p:cNvSpPr>
-          <p:nvPr>
-            <p:ph type="subTitle" idx="2"/>
-          </p:nvPr>
-        </p:nvSpPr>
-        <p:spPr>
-          <a:xfrm>
-            <a:off x="3082400" y="2304911"/>
-            <a:ext cx="5856300" cy="396900"/>
-          </a:xfrm>
-          <a:prstGeom prst="rect">
-            <a:avLst/>
-          </a:prstGeom>
-        </p:spPr>
-        <p:txBody>
-          <a:bodyPr spcFirstLastPara="1" wrap="square" lIns="91425" tIns="91425" rIns="91425" bIns="91425" anchor="t" anchorCtr="0">
-            <a:normAutofit lnSpcReduction="10000"/>
-          </a:bodyPr>
-          <a:lstStyle/>
-          <a:p>
-            <a:pPr marL="0" lvl="0" indent="0" algn="l" rtl="0">
-              <a:spcBef>
-                <a:spcPts val="0"/>
-              </a:spcBef>
-              <a:spcAft>
-                <a:spcPts val="0"/>
-              </a:spcAft>
-              <a:buNone/>
-            </a:pPr>
-            <a:r>
-              <a:rPr lang="ru" dirty="0"/>
-              <a:t>Игорь Стурейко</a:t>
-            </a:r>
-            <a:endParaRPr dirty="0"/>
-          </a:p>
-        </p:txBody>
-      </p:sp>
-      <p:pic>
-        <p:nvPicPr>
-          <p:cNvPr id="3" name="Picture 2">
-            <a:extLst>
-              <a:ext uri="{FF2B5EF4-FFF2-40B4-BE49-F238E27FC236}">
-                <a16:creationId xmlns:a16="http://schemas.microsoft.com/office/drawing/2014/main" id="{522215E3-7B5E-BC4F-9DA6-F65D728D82F1}"/>
-              </a:ext>
-            </a:extLst>
-          </p:cNvPr>
-          <p:cNvPicPr>
-            <a:picLocks noChangeAspect="1"/>
-          </p:cNvPicPr>
-          <p:nvPr/>
-        </p:nvPicPr>
-        <p:blipFill rotWithShape="1">
-          <a:blip r:embed="rId3">
-            <a:extLst>
-              <a:ext uri="{28A0092B-C50C-407E-A947-70E740481C1C}">
-                <a14:useLocalDpi xmlns:a14="http://schemas.microsoft.com/office/drawing/2010/main" val="0"/>
-              </a:ext>
-            </a:extLst>
-          </a:blip>
-          <a:srcRect l="-1" t="12156" r="295"/>
-          <a:stretch/>
-        </p:blipFill>
-        <p:spPr>
-          <a:xfrm>
-            <a:off x="832654" y="2865544"/>
-            <a:ext cx="1662292" cy="1657372"/>
-          </a:xfrm>
-          <a:prstGeom prst="ellipse">
-            <a:avLst/>
-          </a:prstGeom>
-          <a:ln w="12700" cap="rnd">
-            <a:solidFill>
-              <a:srgbClr val="333333"/>
-            </a:solidFill>
-          </a:ln>
-          <a:effectLst>
-            <a:outerShdw blurRad="381000" dist="292100" dir="5400000" sx="-80000" sy="-18000" rotWithShape="0">
-              <a:srgbClr val="000000">
-                <a:alpha val="22000"/>
-              </a:srgbClr>
-            </a:outerShdw>
-          </a:effectLst>
-          <a:scene3d>
-            <a:camera prst="orthographicFront"/>
-            <a:lightRig rig="contrasting" dir="t">
-              <a:rot lat="0" lon="0" rev="3000000"/>
-            </a:lightRig>
-          </a:scene3d>
-          <a:sp3d contourW="7620">
-            <a:bevelT w="95250" h="31750"/>
-            <a:contourClr>
-              <a:srgbClr val="333333"/>
-            </a:contourClr>
-          </a:sp3d>
-        </p:spPr>
-      </p:pic>
-      <p:sp>
-        <p:nvSpPr>
-          <p:cNvPr id="10" name="Google Shape;209;p48">
-            <a:extLst>
-              <a:ext uri="{FF2B5EF4-FFF2-40B4-BE49-F238E27FC236}">
-                <a16:creationId xmlns:a16="http://schemas.microsoft.com/office/drawing/2014/main" id="{ED965473-BBD3-AB44-A950-B109F48DEFA0}"/>
-              </a:ext>
-            </a:extLst>
-          </p:cNvPr>
-          <p:cNvSpPr txBox="1">
-            <a:spLocks/>
-          </p:cNvSpPr>
-          <p:nvPr/>
-        </p:nvSpPr>
-        <p:spPr>
-          <a:xfrm>
-            <a:off x="3082400" y="2701811"/>
-            <a:ext cx="5938750" cy="2133660"/>
-          </a:xfrm>
-          <a:prstGeom prst="rect">
-            <a:avLst/>
-          </a:prstGeom>
-          <a:noFill/>
-          <a:ln>
-            <a:noFill/>
-          </a:ln>
-        </p:spPr>
-        <p:txBody>
-          <a:bodyPr spcFirstLastPara="1" wrap="square" lIns="91425" tIns="91425" rIns="91425" bIns="91425" anchor="t" anchorCtr="0">
-            <a:normAutofit fontScale="85000" lnSpcReduction="20000"/>
-          </a:bodyPr>
-          <a:lstStyle>
-            <a:lvl1pPr marL="0" lvl="0" algn="l">
-              <a:lnSpc>
-                <a:spcPct val="100000"/>
-              </a:lnSpc>
-              <a:spcBef>
-                <a:spcPts val="0"/>
-              </a:spcBef>
-              <a:spcAft>
-                <a:spcPts val="0"/>
-              </a:spcAft>
-              <a:buClr>
-                <a:schemeClr val="dk1"/>
-              </a:buClr>
-              <a:buSzPts val="1300"/>
-              <a:buNone/>
-              <a:defRPr sz="1300" b="0" i="0">
-                <a:solidFill>
-                  <a:schemeClr val="dk1"/>
-                </a:solidFill>
-                <a:latin typeface="+mn-lt"/>
-                <a:ea typeface="+mn-ea"/>
-                <a:cs typeface="+mn-cs"/>
-              </a:defRPr>
-            </a:lvl1pPr>
-            <a:lvl2pPr marL="457200" lvl="1" algn="l">
-              <a:lnSpc>
-                <a:spcPct val="100000"/>
-              </a:lnSpc>
-              <a:spcBef>
-                <a:spcPts val="0"/>
-              </a:spcBef>
-              <a:spcAft>
-                <a:spcPts val="0"/>
-              </a:spcAft>
-              <a:buClr>
-                <a:schemeClr val="dk1"/>
-              </a:buClr>
-              <a:buSzPts val="1500"/>
-              <a:buNone/>
-              <a:defRPr>
-                <a:solidFill>
-                  <a:schemeClr val="dk1"/>
-                </a:solidFill>
-                <a:latin typeface="+mn-lt"/>
-                <a:ea typeface="+mn-ea"/>
-                <a:cs typeface="+mn-cs"/>
-              </a:defRPr>
-            </a:lvl2pPr>
-            <a:lvl3pPr marL="914400" lvl="2" algn="l">
-              <a:lnSpc>
-                <a:spcPct val="100000"/>
-              </a:lnSpc>
-              <a:spcBef>
-                <a:spcPts val="0"/>
-              </a:spcBef>
-              <a:spcAft>
-                <a:spcPts val="0"/>
-              </a:spcAft>
-              <a:buClr>
-                <a:schemeClr val="dk1"/>
-              </a:buClr>
-              <a:buSzPts val="1300"/>
-              <a:buNone/>
-              <a:defRPr>
-                <a:solidFill>
-                  <a:schemeClr val="dk1"/>
-                </a:solidFill>
-                <a:latin typeface="+mn-lt"/>
-                <a:ea typeface="+mn-ea"/>
-                <a:cs typeface="+mn-cs"/>
-              </a:defRPr>
-            </a:lvl3pPr>
-            <a:lvl4pPr marL="1371600" lvl="3" algn="l">
-              <a:lnSpc>
-                <a:spcPct val="100000"/>
-              </a:lnSpc>
-              <a:spcBef>
-                <a:spcPts val="0"/>
-              </a:spcBef>
-              <a:spcAft>
-                <a:spcPts val="0"/>
-              </a:spcAft>
-              <a:buClr>
-                <a:schemeClr val="dk1"/>
-              </a:buClr>
-              <a:buSzPts val="1300"/>
-              <a:buNone/>
-              <a:defRPr>
-                <a:solidFill>
-                  <a:schemeClr val="dk1"/>
-                </a:solidFill>
-                <a:latin typeface="+mn-lt"/>
-                <a:ea typeface="+mn-ea"/>
-                <a:cs typeface="+mn-cs"/>
-              </a:defRPr>
-            </a:lvl4pPr>
-            <a:lvl5pPr marL="1828800" lvl="4" algn="l">
-              <a:lnSpc>
-                <a:spcPct val="100000"/>
-              </a:lnSpc>
-              <a:spcBef>
-                <a:spcPts val="0"/>
-              </a:spcBef>
-              <a:spcAft>
-                <a:spcPts val="0"/>
-              </a:spcAft>
-              <a:buClr>
-                <a:schemeClr val="dk1"/>
-              </a:buClr>
-              <a:buSzPts val="1300"/>
-              <a:buNone/>
-              <a:defRPr>
-                <a:solidFill>
-                  <a:schemeClr val="dk1"/>
-                </a:solidFill>
-                <a:latin typeface="+mn-lt"/>
-                <a:ea typeface="+mn-ea"/>
-                <a:cs typeface="+mn-cs"/>
-              </a:defRPr>
-            </a:lvl5pPr>
-            <a:lvl6pPr marL="2286000" lvl="5" algn="l">
-              <a:lnSpc>
-                <a:spcPct val="100000"/>
-              </a:lnSpc>
-              <a:spcBef>
-                <a:spcPts val="0"/>
-              </a:spcBef>
-              <a:spcAft>
-                <a:spcPts val="0"/>
-              </a:spcAft>
-              <a:buClr>
-                <a:schemeClr val="dk1"/>
-              </a:buClr>
-              <a:buSzPts val="1300"/>
-              <a:buNone/>
-              <a:defRPr>
-                <a:solidFill>
-                  <a:schemeClr val="dk1"/>
-                </a:solidFill>
-                <a:latin typeface="+mn-lt"/>
-                <a:ea typeface="+mn-ea"/>
-                <a:cs typeface="+mn-cs"/>
-              </a:defRPr>
-            </a:lvl6pPr>
-            <a:lvl7pPr marL="2743200" lvl="6" algn="l">
-              <a:lnSpc>
-                <a:spcPct val="100000"/>
-              </a:lnSpc>
-              <a:spcBef>
-                <a:spcPts val="0"/>
-              </a:spcBef>
-              <a:spcAft>
-                <a:spcPts val="0"/>
-              </a:spcAft>
-              <a:buClr>
-                <a:schemeClr val="dk1"/>
-              </a:buClr>
-              <a:buSzPts val="1300"/>
-              <a:buNone/>
-              <a:defRPr>
-                <a:solidFill>
-                  <a:schemeClr val="dk1"/>
-                </a:solidFill>
-                <a:latin typeface="+mn-lt"/>
-                <a:ea typeface="+mn-ea"/>
-                <a:cs typeface="+mn-cs"/>
-              </a:defRPr>
-            </a:lvl7pPr>
-            <a:lvl8pPr marL="3200400" lvl="7" algn="l">
-              <a:lnSpc>
-                <a:spcPct val="100000"/>
-              </a:lnSpc>
-              <a:spcBef>
-                <a:spcPts val="0"/>
-              </a:spcBef>
-              <a:spcAft>
-                <a:spcPts val="0"/>
-              </a:spcAft>
-              <a:buClr>
-                <a:schemeClr val="dk1"/>
-              </a:buClr>
-              <a:buSzPts val="1300"/>
-              <a:buNone/>
-              <a:defRPr>
-                <a:solidFill>
-                  <a:schemeClr val="dk1"/>
-                </a:solidFill>
-                <a:latin typeface="+mn-lt"/>
-                <a:ea typeface="+mn-ea"/>
-                <a:cs typeface="+mn-cs"/>
-              </a:defRPr>
-            </a:lvl8pPr>
-            <a:lvl9pPr marL="3657600" lvl="8" algn="l">
-              <a:lnSpc>
-                <a:spcPct val="100000"/>
-              </a:lnSpc>
-              <a:spcBef>
-                <a:spcPts val="0"/>
-              </a:spcBef>
-              <a:spcAft>
-                <a:spcPts val="0"/>
-              </a:spcAft>
-              <a:buClr>
-                <a:schemeClr val="dk1"/>
-              </a:buClr>
-              <a:buSzPts val="1300"/>
-              <a:buNone/>
-              <a:defRPr>
-                <a:solidFill>
-                  <a:schemeClr val="dk1"/>
-                </a:solidFill>
-                <a:latin typeface="+mn-lt"/>
-                <a:ea typeface="+mn-ea"/>
-                <a:cs typeface="+mn-cs"/>
-              </a:defRPr>
-            </a:lvl9pPr>
-          </a:lstStyle>
-          <a:p>
-            <a:pPr marL="1470025" indent="-1465263">
-              <a:tabLst>
-                <a:tab pos="1465263" algn="l"/>
-              </a:tabLst>
-            </a:pPr>
-            <a:r>
-              <a:rPr lang="ru-RU" sz="1150" b="1" kern="0" dirty="0"/>
-              <a:t>Руководитель курсов: </a:t>
-            </a:r>
-            <a:r>
-              <a:rPr lang="en-US" sz="1150" b="1" kern="0" dirty="0"/>
-              <a:t>	Reinforcement Learning, ML Professional, ML Basic, </a:t>
-            </a:r>
-            <a:br>
-              <a:rPr lang="en-US" sz="1150" b="1" kern="0" dirty="0"/>
-            </a:br>
-            <a:r>
-              <a:rPr lang="en-US" sz="1150" b="1" kern="0" dirty="0" err="1"/>
-              <a:t>MLOps</a:t>
-            </a:r>
-            <a:r>
-              <a:rPr lang="en-US" sz="1150" b="1" kern="0" dirty="0"/>
-              <a:t>, </a:t>
-            </a:r>
-            <a:r>
-              <a:rPr lang="en-US" sz="1150" b="1" kern="0" dirty="0" err="1"/>
-              <a:t>FinML</a:t>
-            </a:r>
-            <a:endParaRPr lang="en-US" sz="1150" b="1" kern="0" dirty="0"/>
-          </a:p>
-          <a:p>
-            <a:pPr rtl="0"/>
-            <a:endParaRPr lang="en-US" sz="1150" b="1" kern="0" dirty="0"/>
-          </a:p>
-          <a:p>
-            <a:pPr rtl="0"/>
-            <a:r>
-              <a:rPr lang="en-US" sz="1150" b="1" kern="0" dirty="0" err="1"/>
-              <a:t>Teamlead</a:t>
-            </a:r>
-            <a:endParaRPr lang="ru-RU" sz="1150" b="1" kern="0" dirty="0"/>
-          </a:p>
-          <a:p>
-            <a:pPr rtl="0"/>
-            <a:r>
-              <a:rPr lang="ru-RU" sz="1150" b="1" kern="0" dirty="0"/>
-              <a:t>Физический факультет МГУ, </a:t>
-            </a:r>
-            <a:r>
-              <a:rPr lang="en-US" sz="1150" b="1" kern="0" dirty="0"/>
-              <a:t>PhD </a:t>
-            </a:r>
-            <a:r>
-              <a:rPr lang="ru-RU" sz="1150" b="1" kern="0" dirty="0"/>
-              <a:t>теоретическая физика</a:t>
-            </a:r>
-          </a:p>
-          <a:p>
-            <a:pPr rtl="0"/>
-            <a:endParaRPr lang="ru-RU" sz="1150" kern="0" dirty="0"/>
-          </a:p>
-          <a:p>
-            <a:pPr rtl="0"/>
-            <a:r>
-              <a:rPr lang="ru-RU" sz="1150" b="1" kern="0" dirty="0"/>
-              <a:t>Опыт:</a:t>
-            </a:r>
-            <a:endParaRPr lang="ru-RU" sz="1150" kern="0" dirty="0"/>
-          </a:p>
-          <a:p>
-            <a:pPr rtl="0"/>
-            <a:r>
-              <a:rPr lang="ru-RU" sz="1150" kern="0" dirty="0"/>
-              <a:t>Более 15 лет занимался прикладной математикой и мат моделированием</a:t>
-            </a:r>
-          </a:p>
-          <a:p>
-            <a:pPr rtl="0"/>
-            <a:r>
-              <a:rPr lang="ru-RU" sz="1150" kern="0" dirty="0"/>
-              <a:t>(</a:t>
-            </a:r>
-            <a:r>
-              <a:rPr lang="en-US" sz="1150" kern="0" dirty="0"/>
-              <a:t>Data Scientist) (Python, </a:t>
-            </a:r>
-            <a:r>
-              <a:rPr lang="ru-RU" sz="1150" kern="0" dirty="0"/>
-              <a:t>С++)</a:t>
-            </a:r>
-          </a:p>
-          <a:p>
-            <a:pPr rtl="0"/>
-            <a:endParaRPr lang="ru-RU" sz="1150" kern="0" dirty="0"/>
-          </a:p>
-          <a:p>
-            <a:pPr rtl="0"/>
-            <a:endParaRPr lang="ru-RU" sz="1150" b="1" kern="0" dirty="0"/>
-          </a:p>
-          <a:p>
-            <a:pPr rtl="0"/>
-            <a:r>
-              <a:rPr lang="ru-RU" sz="1150" b="1" kern="0" dirty="0"/>
-              <a:t>@</a:t>
-            </a:r>
-            <a:r>
-              <a:rPr lang="en-US" sz="1150" b="1" kern="0" dirty="0" err="1"/>
-              <a:t>stureiko</a:t>
-            </a:r>
-            <a:r>
-              <a:rPr lang="en-US" sz="1150" b="1" kern="0" dirty="0"/>
-              <a:t> (TG)</a:t>
-            </a:r>
-          </a:p>
-          <a:p>
-            <a:pPr rtl="0"/>
-            <a:endParaRPr lang="en-US" sz="1150" b="1" kern="0" dirty="0"/>
-          </a:p>
-          <a:p>
-            <a:pPr rtl="0"/>
-            <a:r>
-              <a:rPr lang="en-US" sz="1150" b="1" kern="0" dirty="0"/>
-              <a:t>LinkedIn: </a:t>
-            </a:r>
-            <a:r>
-              <a:rPr lang="en-US" sz="1150" kern="0" dirty="0">
-                <a:hlinkClick r:id="rId4"/>
-              </a:rPr>
-              <a:t>igor-stureiko</a:t>
-            </a:r>
-            <a:r>
-              <a:rPr lang="en-US" sz="1150" kern="0" dirty="0"/>
-              <a:t> </a:t>
-            </a:r>
-          </a:p>
-          <a:p>
-            <a:pPr rtl="0"/>
-            <a:endParaRPr lang="en-US" sz="1150" kern="0" dirty="0"/>
-          </a:p>
-          <a:p>
-            <a:pPr rtl="0"/>
-            <a:r>
-              <a:rPr lang="en-US" sz="1150" b="1" kern="0" dirty="0"/>
-              <a:t>@</a:t>
-            </a:r>
-            <a:r>
-              <a:rPr lang="en-US" sz="1150" b="1" kern="0" dirty="0" err="1"/>
-              <a:t>rl_fintech</a:t>
-            </a:r>
-            <a:r>
-              <a:rPr lang="en-US" sz="1150" b="1" kern="0" dirty="0"/>
-              <a:t> </a:t>
-            </a:r>
-            <a:r>
-              <a:rPr lang="en-US" sz="1150" kern="0" dirty="0"/>
-              <a:t>(</a:t>
-            </a:r>
-            <a:r>
-              <a:rPr lang="ru-RU" sz="1150" kern="0" dirty="0"/>
-              <a:t>Мой канал о моделях в бизнесе)</a:t>
-            </a:r>
-            <a:endParaRPr lang="ru-RU" sz="1400" kern="0" dirty="0"/>
-          </a:p>
-        </p:txBody>
-      </p:sp>
-    </p:spTree>
-  </p:cSld>
-  <p:clrMapOvr>
-    <a:masterClrMapping/>
-  </p:clrMapOvr>
-</p:sld>
-</file>
-
-<file path=ppt/slides/slide30.xml><?xml version="1.0" encoding="utf-8"?>
+<file path=ppt/slides/slide29.xml><?xml version="1.0" encoding="utf-8"?>
 <p:sld xmlns:a="http://schemas.openxmlformats.org/drawingml/2006/main" xmlns:r="http://schemas.openxmlformats.org/officeDocument/2006/relationships" xmlns:p="http://schemas.openxmlformats.org/presentationml/2006/main">
   <p:cSld>
     <p:spTree>
@@ -13395,8 +12560,8 @@
           </a:p>
         </p:txBody>
       </p:sp>
-      <mc:AlternateContent xmlns:mc="http://schemas.openxmlformats.org/markup-compatibility/2006">
-        <mc:Choice xmlns:a14="http://schemas.microsoft.com/office/drawing/2010/main" Requires="a14">
+      <mc:AlternateContent xmlns:mc="http://schemas.openxmlformats.org/markup-compatibility/2006" xmlns:a14="http://schemas.microsoft.com/office/drawing/2010/main">
+        <mc:Choice Requires="a14">
           <p:sp>
             <p:nvSpPr>
               <p:cNvPr id="2" name="TextBox 1">
@@ -14074,7 +13239,7 @@
             </p:txBody>
           </p:sp>
         </mc:Choice>
-        <mc:Fallback>
+        <mc:Fallback xmlns="">
           <p:sp>
             <p:nvSpPr>
               <p:cNvPr id="2" name="TextBox 1">
@@ -14132,7 +13297,693 @@
 </p:sld>
 </file>
 
-<file path=ppt/slides/slide31.xml><?xml version="1.0" encoding="utf-8"?>
+<file path=ppt/slides/slide3.xml><?xml version="1.0" encoding="utf-8"?>
+<p:sld xmlns:a="http://schemas.openxmlformats.org/drawingml/2006/main" xmlns:r="http://schemas.openxmlformats.org/officeDocument/2006/relationships" xmlns:p="http://schemas.openxmlformats.org/presentationml/2006/main">
+  <p:cSld>
+    <p:spTree>
+      <p:nvGrpSpPr>
+        <p:cNvPr id="1" name="Shape 203"/>
+        <p:cNvGrpSpPr/>
+        <p:nvPr/>
+      </p:nvGrpSpPr>
+      <p:grpSpPr>
+        <a:xfrm>
+          <a:off x="0" y="0"/>
+          <a:ext cx="0" cy="0"/>
+          <a:chOff x="0" y="0"/>
+          <a:chExt cx="0" cy="0"/>
+        </a:xfrm>
+      </p:grpSpPr>
+      <p:sp>
+        <p:nvSpPr>
+          <p:cNvPr id="204" name="Google Shape;204;p48"/>
+          <p:cNvSpPr/>
+          <p:nvPr/>
+        </p:nvSpPr>
+        <p:spPr>
+          <a:xfrm>
+            <a:off x="630000" y="2703050"/>
+            <a:ext cx="1033800" cy="1983600"/>
+          </a:xfrm>
+          <a:prstGeom prst="rect">
+            <a:avLst/>
+          </a:prstGeom>
+          <a:solidFill>
+            <a:schemeClr val="accent6"/>
+          </a:solidFill>
+          <a:ln>
+            <a:noFill/>
+          </a:ln>
+        </p:spPr>
+        <p:txBody>
+          <a:bodyPr spcFirstLastPara="1" wrap="square" lIns="91425" tIns="91425" rIns="91425" bIns="91425" anchor="ctr" anchorCtr="0">
+            <a:noAutofit/>
+          </a:bodyPr>
+          <a:lstStyle/>
+          <a:p>
+            <a:pPr marL="0" lvl="0" indent="0" algn="l" rtl="0">
+              <a:spcBef>
+                <a:spcPts val="0"/>
+              </a:spcBef>
+              <a:spcAft>
+                <a:spcPts val="0"/>
+              </a:spcAft>
+              <a:buNone/>
+            </a:pPr>
+            <a:endParaRPr/>
+          </a:p>
+        </p:txBody>
+      </p:sp>
+      <p:sp>
+        <p:nvSpPr>
+          <p:cNvPr id="206" name="Google Shape;206;p48"/>
+          <p:cNvSpPr txBox="1">
+            <a:spLocks noGrp="1"/>
+          </p:cNvSpPr>
+          <p:nvPr>
+            <p:ph type="title"/>
+          </p:nvPr>
+        </p:nvSpPr>
+        <p:spPr>
+          <a:xfrm>
+            <a:off x="500550" y="821219"/>
+            <a:ext cx="8520600" cy="1032900"/>
+          </a:xfrm>
+          <a:prstGeom prst="rect">
+            <a:avLst/>
+          </a:prstGeom>
+        </p:spPr>
+        <p:txBody>
+          <a:bodyPr spcFirstLastPara="1" wrap="square" lIns="91425" tIns="91425" rIns="91425" bIns="91425" anchor="t" anchorCtr="0">
+            <a:noAutofit/>
+          </a:bodyPr>
+          <a:lstStyle/>
+          <a:p>
+            <a:pPr marL="0" lvl="0" indent="0" algn="l" rtl="0">
+              <a:spcBef>
+                <a:spcPts val="0"/>
+              </a:spcBef>
+              <a:spcAft>
+                <a:spcPts val="0"/>
+              </a:spcAft>
+              <a:buClr>
+                <a:schemeClr val="dk1"/>
+              </a:buClr>
+              <a:buSzPts val="1100"/>
+              <a:buFont typeface="Arial"/>
+              <a:buNone/>
+            </a:pPr>
+            <a:r>
+              <a:rPr lang="en-US" dirty="0"/>
+              <a:t>Python </a:t>
+            </a:r>
+            <a:r>
+              <a:rPr lang="ru-RU" dirty="0"/>
+              <a:t>для аналитики</a:t>
+            </a:r>
+            <a:br>
+              <a:rPr lang="en-US" dirty="0"/>
+            </a:br>
+            <a:r>
+              <a:rPr lang="ru-RU" sz="3200" b="1" dirty="0">
+                <a:latin typeface="Roboto"/>
+                <a:ea typeface="Roboto"/>
+                <a:cs typeface="Roboto"/>
+                <a:sym typeface="Roboto"/>
+              </a:rPr>
+              <a:t>А/Б тесты</a:t>
+            </a:r>
+            <a:endParaRPr dirty="0"/>
+          </a:p>
+        </p:txBody>
+      </p:sp>
+      <p:sp>
+        <p:nvSpPr>
+          <p:cNvPr id="207" name="Google Shape;207;p48"/>
+          <p:cNvSpPr txBox="1">
+            <a:spLocks noGrp="1"/>
+          </p:cNvSpPr>
+          <p:nvPr>
+            <p:ph type="subTitle" idx="1"/>
+          </p:nvPr>
+        </p:nvSpPr>
+        <p:spPr>
+          <a:xfrm>
+            <a:off x="500550" y="520133"/>
+            <a:ext cx="7796700" cy="356926"/>
+          </a:xfrm>
+          <a:prstGeom prst="rect">
+            <a:avLst/>
+          </a:prstGeom>
+        </p:spPr>
+        <p:txBody>
+          <a:bodyPr spcFirstLastPara="1" wrap="square" lIns="91425" tIns="91425" rIns="91425" bIns="91425" anchor="t" anchorCtr="0">
+            <a:normAutofit fontScale="92500" lnSpcReduction="20000"/>
+          </a:bodyPr>
+          <a:lstStyle/>
+          <a:p>
+            <a:pPr marL="0" lvl="0" indent="0" algn="l" rtl="0">
+              <a:spcBef>
+                <a:spcPts val="0"/>
+              </a:spcBef>
+              <a:spcAft>
+                <a:spcPts val="0"/>
+              </a:spcAft>
+              <a:buNone/>
+            </a:pPr>
+            <a:r>
+              <a:rPr lang="ru" dirty="0"/>
+              <a:t>Тема вебинара</a:t>
+            </a:r>
+            <a:endParaRPr dirty="0"/>
+          </a:p>
+        </p:txBody>
+      </p:sp>
+      <p:sp>
+        <p:nvSpPr>
+          <p:cNvPr id="208" name="Google Shape;208;p48"/>
+          <p:cNvSpPr txBox="1">
+            <a:spLocks noGrp="1"/>
+          </p:cNvSpPr>
+          <p:nvPr>
+            <p:ph type="subTitle" idx="2"/>
+          </p:nvPr>
+        </p:nvSpPr>
+        <p:spPr>
+          <a:xfrm>
+            <a:off x="3082400" y="2304911"/>
+            <a:ext cx="5856300" cy="396900"/>
+          </a:xfrm>
+          <a:prstGeom prst="rect">
+            <a:avLst/>
+          </a:prstGeom>
+        </p:spPr>
+        <p:txBody>
+          <a:bodyPr spcFirstLastPara="1" wrap="square" lIns="91425" tIns="91425" rIns="91425" bIns="91425" anchor="t" anchorCtr="0">
+            <a:normAutofit lnSpcReduction="10000"/>
+          </a:bodyPr>
+          <a:lstStyle/>
+          <a:p>
+            <a:pPr marL="0" lvl="0" indent="0" algn="l" rtl="0">
+              <a:spcBef>
+                <a:spcPts val="0"/>
+              </a:spcBef>
+              <a:spcAft>
+                <a:spcPts val="0"/>
+              </a:spcAft>
+              <a:buNone/>
+            </a:pPr>
+            <a:r>
+              <a:rPr lang="ru" dirty="0"/>
+              <a:t>Игорь Стурейко</a:t>
+            </a:r>
+            <a:endParaRPr dirty="0"/>
+          </a:p>
+        </p:txBody>
+      </p:sp>
+      <p:pic>
+        <p:nvPicPr>
+          <p:cNvPr id="3" name="Picture 2">
+            <a:extLst>
+              <a:ext uri="{FF2B5EF4-FFF2-40B4-BE49-F238E27FC236}">
+                <a16:creationId xmlns:a16="http://schemas.microsoft.com/office/drawing/2014/main" id="{522215E3-7B5E-BC4F-9DA6-F65D728D82F1}"/>
+              </a:ext>
+            </a:extLst>
+          </p:cNvPr>
+          <p:cNvPicPr>
+            <a:picLocks noChangeAspect="1"/>
+          </p:cNvPicPr>
+          <p:nvPr/>
+        </p:nvPicPr>
+        <p:blipFill rotWithShape="1">
+          <a:blip r:embed="rId3">
+            <a:extLst>
+              <a:ext uri="{28A0092B-C50C-407E-A947-70E740481C1C}">
+                <a14:useLocalDpi xmlns:a14="http://schemas.microsoft.com/office/drawing/2010/main" val="0"/>
+              </a:ext>
+            </a:extLst>
+          </a:blip>
+          <a:srcRect l="-1" t="12156" r="295"/>
+          <a:stretch/>
+        </p:blipFill>
+        <p:spPr>
+          <a:xfrm>
+            <a:off x="832654" y="2865544"/>
+            <a:ext cx="1662292" cy="1657372"/>
+          </a:xfrm>
+          <a:prstGeom prst="ellipse">
+            <a:avLst/>
+          </a:prstGeom>
+          <a:ln w="12700" cap="rnd">
+            <a:solidFill>
+              <a:srgbClr val="333333"/>
+            </a:solidFill>
+          </a:ln>
+          <a:effectLst>
+            <a:outerShdw blurRad="381000" dist="292100" dir="5400000" sx="-80000" sy="-18000" rotWithShape="0">
+              <a:srgbClr val="000000">
+                <a:alpha val="22000"/>
+              </a:srgbClr>
+            </a:outerShdw>
+          </a:effectLst>
+          <a:scene3d>
+            <a:camera prst="orthographicFront"/>
+            <a:lightRig rig="contrasting" dir="t">
+              <a:rot lat="0" lon="0" rev="3000000"/>
+            </a:lightRig>
+          </a:scene3d>
+          <a:sp3d contourW="7620">
+            <a:bevelT w="95250" h="31750"/>
+            <a:contourClr>
+              <a:srgbClr val="333333"/>
+            </a:contourClr>
+          </a:sp3d>
+        </p:spPr>
+      </p:pic>
+      <p:sp>
+        <p:nvSpPr>
+          <p:cNvPr id="10" name="Google Shape;209;p48">
+            <a:extLst>
+              <a:ext uri="{FF2B5EF4-FFF2-40B4-BE49-F238E27FC236}">
+                <a16:creationId xmlns:a16="http://schemas.microsoft.com/office/drawing/2014/main" id="{ED965473-BBD3-AB44-A950-B109F48DEFA0}"/>
+              </a:ext>
+            </a:extLst>
+          </p:cNvPr>
+          <p:cNvSpPr txBox="1">
+            <a:spLocks/>
+          </p:cNvSpPr>
+          <p:nvPr/>
+        </p:nvSpPr>
+        <p:spPr>
+          <a:xfrm>
+            <a:off x="3082400" y="2701811"/>
+            <a:ext cx="5938750" cy="2133660"/>
+          </a:xfrm>
+          <a:prstGeom prst="rect">
+            <a:avLst/>
+          </a:prstGeom>
+          <a:noFill/>
+          <a:ln>
+            <a:noFill/>
+          </a:ln>
+        </p:spPr>
+        <p:txBody>
+          <a:bodyPr spcFirstLastPara="1" wrap="square" lIns="91425" tIns="91425" rIns="91425" bIns="91425" anchor="t" anchorCtr="0">
+            <a:normAutofit fontScale="85000" lnSpcReduction="20000"/>
+          </a:bodyPr>
+          <a:lstStyle>
+            <a:lvl1pPr marL="0" lvl="0" algn="l">
+              <a:lnSpc>
+                <a:spcPct val="100000"/>
+              </a:lnSpc>
+              <a:spcBef>
+                <a:spcPts val="0"/>
+              </a:spcBef>
+              <a:spcAft>
+                <a:spcPts val="0"/>
+              </a:spcAft>
+              <a:buClr>
+                <a:schemeClr val="dk1"/>
+              </a:buClr>
+              <a:buSzPts val="1300"/>
+              <a:buNone/>
+              <a:defRPr sz="1300" b="0" i="0">
+                <a:solidFill>
+                  <a:schemeClr val="dk1"/>
+                </a:solidFill>
+                <a:latin typeface="+mn-lt"/>
+                <a:ea typeface="+mn-ea"/>
+                <a:cs typeface="+mn-cs"/>
+              </a:defRPr>
+            </a:lvl1pPr>
+            <a:lvl2pPr marL="457200" lvl="1" algn="l">
+              <a:lnSpc>
+                <a:spcPct val="100000"/>
+              </a:lnSpc>
+              <a:spcBef>
+                <a:spcPts val="0"/>
+              </a:spcBef>
+              <a:spcAft>
+                <a:spcPts val="0"/>
+              </a:spcAft>
+              <a:buClr>
+                <a:schemeClr val="dk1"/>
+              </a:buClr>
+              <a:buSzPts val="1500"/>
+              <a:buNone/>
+              <a:defRPr>
+                <a:solidFill>
+                  <a:schemeClr val="dk1"/>
+                </a:solidFill>
+                <a:latin typeface="+mn-lt"/>
+                <a:ea typeface="+mn-ea"/>
+                <a:cs typeface="+mn-cs"/>
+              </a:defRPr>
+            </a:lvl2pPr>
+            <a:lvl3pPr marL="914400" lvl="2" algn="l">
+              <a:lnSpc>
+                <a:spcPct val="100000"/>
+              </a:lnSpc>
+              <a:spcBef>
+                <a:spcPts val="0"/>
+              </a:spcBef>
+              <a:spcAft>
+                <a:spcPts val="0"/>
+              </a:spcAft>
+              <a:buClr>
+                <a:schemeClr val="dk1"/>
+              </a:buClr>
+              <a:buSzPts val="1300"/>
+              <a:buNone/>
+              <a:defRPr>
+                <a:solidFill>
+                  <a:schemeClr val="dk1"/>
+                </a:solidFill>
+                <a:latin typeface="+mn-lt"/>
+                <a:ea typeface="+mn-ea"/>
+                <a:cs typeface="+mn-cs"/>
+              </a:defRPr>
+            </a:lvl3pPr>
+            <a:lvl4pPr marL="1371600" lvl="3" algn="l">
+              <a:lnSpc>
+                <a:spcPct val="100000"/>
+              </a:lnSpc>
+              <a:spcBef>
+                <a:spcPts val="0"/>
+              </a:spcBef>
+              <a:spcAft>
+                <a:spcPts val="0"/>
+              </a:spcAft>
+              <a:buClr>
+                <a:schemeClr val="dk1"/>
+              </a:buClr>
+              <a:buSzPts val="1300"/>
+              <a:buNone/>
+              <a:defRPr>
+                <a:solidFill>
+                  <a:schemeClr val="dk1"/>
+                </a:solidFill>
+                <a:latin typeface="+mn-lt"/>
+                <a:ea typeface="+mn-ea"/>
+                <a:cs typeface="+mn-cs"/>
+              </a:defRPr>
+            </a:lvl4pPr>
+            <a:lvl5pPr marL="1828800" lvl="4" algn="l">
+              <a:lnSpc>
+                <a:spcPct val="100000"/>
+              </a:lnSpc>
+              <a:spcBef>
+                <a:spcPts val="0"/>
+              </a:spcBef>
+              <a:spcAft>
+                <a:spcPts val="0"/>
+              </a:spcAft>
+              <a:buClr>
+                <a:schemeClr val="dk1"/>
+              </a:buClr>
+              <a:buSzPts val="1300"/>
+              <a:buNone/>
+              <a:defRPr>
+                <a:solidFill>
+                  <a:schemeClr val="dk1"/>
+                </a:solidFill>
+                <a:latin typeface="+mn-lt"/>
+                <a:ea typeface="+mn-ea"/>
+                <a:cs typeface="+mn-cs"/>
+              </a:defRPr>
+            </a:lvl5pPr>
+            <a:lvl6pPr marL="2286000" lvl="5" algn="l">
+              <a:lnSpc>
+                <a:spcPct val="100000"/>
+              </a:lnSpc>
+              <a:spcBef>
+                <a:spcPts val="0"/>
+              </a:spcBef>
+              <a:spcAft>
+                <a:spcPts val="0"/>
+              </a:spcAft>
+              <a:buClr>
+                <a:schemeClr val="dk1"/>
+              </a:buClr>
+              <a:buSzPts val="1300"/>
+              <a:buNone/>
+              <a:defRPr>
+                <a:solidFill>
+                  <a:schemeClr val="dk1"/>
+                </a:solidFill>
+                <a:latin typeface="+mn-lt"/>
+                <a:ea typeface="+mn-ea"/>
+                <a:cs typeface="+mn-cs"/>
+              </a:defRPr>
+            </a:lvl6pPr>
+            <a:lvl7pPr marL="2743200" lvl="6" algn="l">
+              <a:lnSpc>
+                <a:spcPct val="100000"/>
+              </a:lnSpc>
+              <a:spcBef>
+                <a:spcPts val="0"/>
+              </a:spcBef>
+              <a:spcAft>
+                <a:spcPts val="0"/>
+              </a:spcAft>
+              <a:buClr>
+                <a:schemeClr val="dk1"/>
+              </a:buClr>
+              <a:buSzPts val="1300"/>
+              <a:buNone/>
+              <a:defRPr>
+                <a:solidFill>
+                  <a:schemeClr val="dk1"/>
+                </a:solidFill>
+                <a:latin typeface="+mn-lt"/>
+                <a:ea typeface="+mn-ea"/>
+                <a:cs typeface="+mn-cs"/>
+              </a:defRPr>
+            </a:lvl7pPr>
+            <a:lvl8pPr marL="3200400" lvl="7" algn="l">
+              <a:lnSpc>
+                <a:spcPct val="100000"/>
+              </a:lnSpc>
+              <a:spcBef>
+                <a:spcPts val="0"/>
+              </a:spcBef>
+              <a:spcAft>
+                <a:spcPts val="0"/>
+              </a:spcAft>
+              <a:buClr>
+                <a:schemeClr val="dk1"/>
+              </a:buClr>
+              <a:buSzPts val="1300"/>
+              <a:buNone/>
+              <a:defRPr>
+                <a:solidFill>
+                  <a:schemeClr val="dk1"/>
+                </a:solidFill>
+                <a:latin typeface="+mn-lt"/>
+                <a:ea typeface="+mn-ea"/>
+                <a:cs typeface="+mn-cs"/>
+              </a:defRPr>
+            </a:lvl8pPr>
+            <a:lvl9pPr marL="3657600" lvl="8" algn="l">
+              <a:lnSpc>
+                <a:spcPct val="100000"/>
+              </a:lnSpc>
+              <a:spcBef>
+                <a:spcPts val="0"/>
+              </a:spcBef>
+              <a:spcAft>
+                <a:spcPts val="0"/>
+              </a:spcAft>
+              <a:buClr>
+                <a:schemeClr val="dk1"/>
+              </a:buClr>
+              <a:buSzPts val="1300"/>
+              <a:buNone/>
+              <a:defRPr>
+                <a:solidFill>
+                  <a:schemeClr val="dk1"/>
+                </a:solidFill>
+                <a:latin typeface="+mn-lt"/>
+                <a:ea typeface="+mn-ea"/>
+                <a:cs typeface="+mn-cs"/>
+              </a:defRPr>
+            </a:lvl9pPr>
+          </a:lstStyle>
+          <a:p>
+            <a:pPr marL="1470025" indent="-1465263">
+              <a:tabLst>
+                <a:tab pos="1465263" algn="l"/>
+              </a:tabLst>
+            </a:pPr>
+            <a:r>
+              <a:rPr lang="ru-RU" sz="1150" b="1" kern="0" dirty="0"/>
+              <a:t>Руководитель курсов: </a:t>
+            </a:r>
+            <a:r>
+              <a:rPr lang="en-US" sz="1150" b="1" kern="0" dirty="0"/>
+              <a:t>	Reinforcement Learning, ML Professional, ML Basic, </a:t>
+            </a:r>
+            <a:br>
+              <a:rPr lang="en-US" sz="1150" b="1" kern="0" dirty="0"/>
+            </a:br>
+            <a:r>
+              <a:rPr lang="en-US" sz="1150" b="1" kern="0" dirty="0" err="1"/>
+              <a:t>MLOps</a:t>
+            </a:r>
+            <a:r>
+              <a:rPr lang="en-US" sz="1150" b="1" kern="0" dirty="0"/>
+              <a:t>, </a:t>
+            </a:r>
+            <a:r>
+              <a:rPr lang="en-US" sz="1150" b="1" kern="0" dirty="0" err="1"/>
+              <a:t>FinML</a:t>
+            </a:r>
+            <a:endParaRPr lang="en-US" sz="1150" b="1" kern="0" dirty="0"/>
+          </a:p>
+          <a:p>
+            <a:pPr rtl="0"/>
+            <a:endParaRPr lang="en-US" sz="1150" b="1" kern="0" dirty="0"/>
+          </a:p>
+          <a:p>
+            <a:pPr rtl="0"/>
+            <a:r>
+              <a:rPr lang="en-US" sz="1150" b="1" kern="0" dirty="0" err="1"/>
+              <a:t>Teamlead</a:t>
+            </a:r>
+            <a:endParaRPr lang="ru-RU" sz="1150" b="1" kern="0" dirty="0"/>
+          </a:p>
+          <a:p>
+            <a:pPr rtl="0"/>
+            <a:r>
+              <a:rPr lang="ru-RU" sz="1150" b="1" kern="0" dirty="0"/>
+              <a:t>Физический факультет МГУ, </a:t>
+            </a:r>
+            <a:r>
+              <a:rPr lang="en-US" sz="1150" b="1" kern="0" dirty="0"/>
+              <a:t>PhD </a:t>
+            </a:r>
+            <a:r>
+              <a:rPr lang="ru-RU" sz="1150" b="1" kern="0" dirty="0"/>
+              <a:t>теоретическая физика</a:t>
+            </a:r>
+          </a:p>
+          <a:p>
+            <a:pPr rtl="0"/>
+            <a:endParaRPr lang="ru-RU" sz="1150" kern="0" dirty="0"/>
+          </a:p>
+          <a:p>
+            <a:pPr rtl="0"/>
+            <a:r>
+              <a:rPr lang="ru-RU" sz="1150" b="1" kern="0" dirty="0"/>
+              <a:t>Опыт:</a:t>
+            </a:r>
+            <a:endParaRPr lang="ru-RU" sz="1150" kern="0" dirty="0"/>
+          </a:p>
+          <a:p>
+            <a:pPr rtl="0"/>
+            <a:r>
+              <a:rPr lang="ru-RU" sz="1150" kern="0" dirty="0"/>
+              <a:t>Более 15 лет занимался прикладной математикой и мат моделированием</a:t>
+            </a:r>
+          </a:p>
+          <a:p>
+            <a:pPr rtl="0"/>
+            <a:r>
+              <a:rPr lang="ru-RU" sz="1150" kern="0" dirty="0"/>
+              <a:t>(</a:t>
+            </a:r>
+            <a:r>
+              <a:rPr lang="en-US" sz="1150" kern="0" dirty="0"/>
+              <a:t>Data Scientist) (Python, </a:t>
+            </a:r>
+            <a:r>
+              <a:rPr lang="ru-RU" sz="1150" kern="0" dirty="0"/>
+              <a:t>С++)</a:t>
+            </a:r>
+          </a:p>
+          <a:p>
+            <a:pPr rtl="0"/>
+            <a:endParaRPr lang="ru-RU" sz="1150" kern="0" dirty="0"/>
+          </a:p>
+          <a:p>
+            <a:pPr rtl="0"/>
+            <a:endParaRPr lang="ru-RU" sz="1150" b="1" kern="0" dirty="0"/>
+          </a:p>
+          <a:p>
+            <a:pPr rtl="0"/>
+            <a:r>
+              <a:rPr lang="ru-RU" sz="1150" b="1" kern="0" dirty="0"/>
+              <a:t>@</a:t>
+            </a:r>
+            <a:r>
+              <a:rPr lang="en-US" sz="1150" b="1" kern="0" dirty="0" err="1"/>
+              <a:t>stureiko</a:t>
+            </a:r>
+            <a:r>
+              <a:rPr lang="en-US" sz="1150" b="1" kern="0" dirty="0"/>
+              <a:t> (TG)</a:t>
+            </a:r>
+          </a:p>
+          <a:p>
+            <a:pPr rtl="0"/>
+            <a:endParaRPr lang="en-US" sz="1150" b="1" kern="0" dirty="0"/>
+          </a:p>
+          <a:p>
+            <a:pPr rtl="0"/>
+            <a:r>
+              <a:rPr lang="en-US" sz="1150" b="1" kern="0" dirty="0"/>
+              <a:t>LinkedIn: </a:t>
+            </a:r>
+            <a:r>
+              <a:rPr lang="en-US" sz="1150" kern="0" dirty="0">
+                <a:hlinkClick r:id="rId4"/>
+              </a:rPr>
+              <a:t>igor-stureiko</a:t>
+            </a:r>
+            <a:r>
+              <a:rPr lang="en-US" sz="1150" kern="0" dirty="0"/>
+              <a:t> </a:t>
+            </a:r>
+          </a:p>
+          <a:p>
+            <a:pPr rtl="0"/>
+            <a:endParaRPr lang="en-US" sz="1150" kern="0" dirty="0"/>
+          </a:p>
+          <a:p>
+            <a:pPr rtl="0"/>
+            <a:r>
+              <a:rPr lang="en-US" sz="1150" b="1" kern="0" dirty="0"/>
+              <a:t>@</a:t>
+            </a:r>
+            <a:r>
+              <a:rPr lang="en-US" sz="1150" b="1" kern="0" dirty="0" err="1"/>
+              <a:t>rl_fintech</a:t>
+            </a:r>
+            <a:r>
+              <a:rPr lang="en-US" sz="1150" b="1" kern="0" dirty="0"/>
+              <a:t> </a:t>
+            </a:r>
+            <a:r>
+              <a:rPr lang="en-US" sz="1150" kern="0" dirty="0"/>
+              <a:t>(</a:t>
+            </a:r>
+            <a:r>
+              <a:rPr lang="ru-RU" sz="1150" kern="0" dirty="0"/>
+              <a:t>Мой канал о моделях в бизнесе)</a:t>
+            </a:r>
+            <a:endParaRPr lang="ru-RU" sz="1400" kern="0" dirty="0"/>
+          </a:p>
+        </p:txBody>
+      </p:sp>
+    </p:spTree>
+  </p:cSld>
+  <p:clrMapOvr>
+    <a:masterClrMapping/>
+  </p:clrMapOvr>
+</p:sld>
+</file>
+
+<file path=ppt/slides/slide30.xml><?xml version="1.0" encoding="utf-8"?>
 <p:sld xmlns:a="http://schemas.openxmlformats.org/drawingml/2006/main" xmlns:r="http://schemas.openxmlformats.org/officeDocument/2006/relationships" xmlns:p="http://schemas.openxmlformats.org/presentationml/2006/main">
   <p:cSld>
     <p:spTree>
@@ -14190,8 +14041,8 @@
           </a:p>
         </p:txBody>
       </p:sp>
-      <mc:AlternateContent xmlns:mc="http://schemas.openxmlformats.org/markup-compatibility/2006">
-        <mc:Choice xmlns:a14="http://schemas.microsoft.com/office/drawing/2010/main" Requires="a14">
+      <mc:AlternateContent xmlns:mc="http://schemas.openxmlformats.org/markup-compatibility/2006" xmlns:a14="http://schemas.microsoft.com/office/drawing/2010/main">
+        <mc:Choice Requires="a14">
           <p:sp>
             <p:nvSpPr>
               <p:cNvPr id="2" name="TextBox 1">
@@ -15034,7 +14885,7 @@
             </p:txBody>
           </p:sp>
         </mc:Choice>
-        <mc:Fallback>
+        <mc:Fallback xmlns="">
           <p:sp>
             <p:nvSpPr>
               <p:cNvPr id="2" name="TextBox 1">
@@ -15092,7 +14943,7 @@
 </p:sld>
 </file>
 
-<file path=ppt/slides/slide32.xml><?xml version="1.0" encoding="utf-8"?>
+<file path=ppt/slides/slide31.xml><?xml version="1.0" encoding="utf-8"?>
 <p:sld xmlns:a="http://schemas.openxmlformats.org/drawingml/2006/main" xmlns:r="http://schemas.openxmlformats.org/officeDocument/2006/relationships" xmlns:p="http://schemas.openxmlformats.org/presentationml/2006/main">
   <p:cSld>
     <p:spTree>
@@ -15172,7 +15023,7 @@
 </p:sld>
 </file>
 
-<file path=ppt/slides/slide33.xml><?xml version="1.0" encoding="utf-8"?>
+<file path=ppt/slides/slide32.xml><?xml version="1.0" encoding="utf-8"?>
 <p:sld xmlns:a="http://schemas.openxmlformats.org/drawingml/2006/main" xmlns:r="http://schemas.openxmlformats.org/officeDocument/2006/relationships" xmlns:p="http://schemas.openxmlformats.org/presentationml/2006/main">
   <p:cSld>
     <p:spTree>
@@ -15220,10 +15071,10 @@
       </p:sp>
       <p:pic>
         <p:nvPicPr>
-          <p:cNvPr id="4" name="Picture 3">
+          <p:cNvPr id="2" name="Picture 1">
             <a:extLst>
               <a:ext uri="{FF2B5EF4-FFF2-40B4-BE49-F238E27FC236}">
-                <a16:creationId xmlns:a16="http://schemas.microsoft.com/office/drawing/2014/main" id="{C7D92323-1E4C-D045-B2BE-69AC34C8CB20}"/>
+                <a16:creationId xmlns:a16="http://schemas.microsoft.com/office/drawing/2014/main" id="{E167BDFD-76DF-D94D-A5C2-D0BF7686CC40}"/>
               </a:ext>
             </a:extLst>
           </p:cNvPr>
@@ -15240,8 +15091,38 @@
         </p:blipFill>
         <p:spPr>
           <a:xfrm>
-            <a:off x="1365250" y="1449220"/>
-            <a:ext cx="6413500" cy="3327400"/>
+            <a:off x="122850" y="1276350"/>
+            <a:ext cx="4445000" cy="3352800"/>
+          </a:xfrm>
+          <a:prstGeom prst="rect">
+            <a:avLst/>
+          </a:prstGeom>
+        </p:spPr>
+      </p:pic>
+      <p:pic>
+        <p:nvPicPr>
+          <p:cNvPr id="5" name="Picture 4">
+            <a:extLst>
+              <a:ext uri="{FF2B5EF4-FFF2-40B4-BE49-F238E27FC236}">
+                <a16:creationId xmlns:a16="http://schemas.microsoft.com/office/drawing/2014/main" id="{296D8968-8180-1C43-B9E2-5CD91A41A3BE}"/>
+              </a:ext>
+            </a:extLst>
+          </p:cNvPr>
+          <p:cNvPicPr>
+            <a:picLocks noChangeAspect="1"/>
+          </p:cNvPicPr>
+          <p:nvPr/>
+        </p:nvPicPr>
+        <p:blipFill>
+          <a:blip r:embed="rId3"/>
+          <a:stretch>
+            <a:fillRect/>
+          </a:stretch>
+        </p:blipFill>
+        <p:spPr>
+          <a:xfrm>
+            <a:off x="4576152" y="1301750"/>
+            <a:ext cx="4445000" cy="3327400"/>
           </a:xfrm>
           <a:prstGeom prst="rect">
             <a:avLst/>
@@ -15261,7 +15142,7 @@
 </p:sld>
 </file>
 
-<file path=ppt/slides/slide34.xml><?xml version="1.0" encoding="utf-8"?>
+<file path=ppt/slides/slide33.xml><?xml version="1.0" encoding="utf-8"?>
 <p:sld xmlns:a="http://schemas.openxmlformats.org/drawingml/2006/main" xmlns:r="http://schemas.openxmlformats.org/officeDocument/2006/relationships" xmlns:p="http://schemas.openxmlformats.org/presentationml/2006/main">
   <p:cSld>
     <p:spTree>
@@ -15649,7 +15530,7 @@
 </p:sld>
 </file>
 
-<file path=ppt/slides/slide35.xml><?xml version="1.0" encoding="utf-8"?>
+<file path=ppt/slides/slide34.xml><?xml version="1.0" encoding="utf-8"?>
 <p:sld xmlns:a="http://schemas.openxmlformats.org/drawingml/2006/main" xmlns:r="http://schemas.openxmlformats.org/officeDocument/2006/relationships" xmlns:p="http://schemas.openxmlformats.org/presentationml/2006/main">
   <p:cSld>
     <p:spTree>
@@ -15724,7 +15605,7 @@
 </p:sld>
 </file>
 
-<file path=ppt/slides/slide36.xml><?xml version="1.0" encoding="utf-8"?>
+<file path=ppt/slides/slide35.xml><?xml version="1.0" encoding="utf-8"?>
 <p:sld xmlns:a="http://schemas.openxmlformats.org/drawingml/2006/main" xmlns:r="http://schemas.openxmlformats.org/officeDocument/2006/relationships" xmlns:p="http://schemas.openxmlformats.org/presentationml/2006/main">
   <p:cSld>
     <p:spTree>
@@ -16313,7 +16194,7 @@
 </p:sld>
 </file>
 
-<file path=ppt/slides/slide37.xml><?xml version="1.0" encoding="utf-8"?>
+<file path=ppt/slides/slide36.xml><?xml version="1.0" encoding="utf-8"?>
 <p:sld xmlns:a="http://schemas.openxmlformats.org/drawingml/2006/main" xmlns:r="http://schemas.openxmlformats.org/officeDocument/2006/relationships" xmlns:p="http://schemas.openxmlformats.org/presentationml/2006/main">
   <p:cSld>
     <p:spTree>
@@ -16701,7 +16582,7 @@
 </p:sld>
 </file>
 
-<file path=ppt/slides/slide38.xml><?xml version="1.0" encoding="utf-8"?>
+<file path=ppt/slides/slide37.xml><?xml version="1.0" encoding="utf-8"?>
 <p:sld xmlns:a="http://schemas.openxmlformats.org/drawingml/2006/main" xmlns:r="http://schemas.openxmlformats.org/officeDocument/2006/relationships" xmlns:p="http://schemas.openxmlformats.org/presentationml/2006/main">
   <p:cSld>
     <p:spTree>
@@ -16919,7 +16800,7 @@
 </p:sld>
 </file>
 
-<file path=ppt/slides/slide39.xml><?xml version="1.0" encoding="utf-8"?>
+<file path=ppt/slides/slide38.xml><?xml version="1.0" encoding="utf-8"?>
 <p:sld xmlns:a="http://schemas.openxmlformats.org/drawingml/2006/main" xmlns:r="http://schemas.openxmlformats.org/officeDocument/2006/relationships" xmlns:p="http://schemas.openxmlformats.org/presentationml/2006/main">
   <p:cSld>
     <p:spTree>
@@ -16992,6 +16873,307 @@
         <p14:creationId xmlns:p14="http://schemas.microsoft.com/office/powerpoint/2010/main" val="2157372581"/>
       </p:ext>
     </p:extLst>
+  </p:cSld>
+  <p:clrMapOvr>
+    <a:masterClrMapping/>
+  </p:clrMapOvr>
+</p:sld>
+</file>
+
+<file path=ppt/slides/slide39.xml><?xml version="1.0" encoding="utf-8"?>
+<p:sld xmlns:a="http://schemas.openxmlformats.org/drawingml/2006/main" xmlns:r="http://schemas.openxmlformats.org/officeDocument/2006/relationships" xmlns:p="http://schemas.openxmlformats.org/presentationml/2006/main">
+  <p:cSld>
+    <p:spTree>
+      <p:nvGrpSpPr>
+        <p:cNvPr id="1" name="Shape 484"/>
+        <p:cNvGrpSpPr/>
+        <p:nvPr/>
+      </p:nvGrpSpPr>
+      <p:grpSpPr>
+        <a:xfrm>
+          <a:off x="0" y="0"/>
+          <a:ext cx="0" cy="0"/>
+          <a:chOff x="0" y="0"/>
+          <a:chExt cx="0" cy="0"/>
+        </a:xfrm>
+      </p:grpSpPr>
+      <p:sp>
+        <p:nvSpPr>
+          <p:cNvPr id="485" name="Google Shape;485;p75"/>
+          <p:cNvSpPr txBox="1">
+            <a:spLocks noGrp="1"/>
+          </p:cNvSpPr>
+          <p:nvPr>
+            <p:ph type="title"/>
+          </p:nvPr>
+        </p:nvSpPr>
+        <p:spPr>
+          <a:xfrm>
+            <a:off x="500550" y="330724"/>
+            <a:ext cx="8520600" cy="1095900"/>
+          </a:xfrm>
+          <a:prstGeom prst="rect">
+            <a:avLst/>
+          </a:prstGeom>
+          <a:noFill/>
+          <a:ln>
+            <a:noFill/>
+          </a:ln>
+        </p:spPr>
+        <p:txBody>
+          <a:bodyPr spcFirstLastPara="1" wrap="square" lIns="91425" tIns="91425" rIns="91425" bIns="91425" anchor="t" anchorCtr="0">
+            <a:noAutofit/>
+          </a:bodyPr>
+          <a:lstStyle/>
+          <a:p>
+            <a:pPr marL="0" lvl="0" indent="0" algn="l" rtl="0">
+              <a:lnSpc>
+                <a:spcPct val="100000"/>
+              </a:lnSpc>
+              <a:spcBef>
+                <a:spcPts val="0"/>
+              </a:spcBef>
+              <a:spcAft>
+                <a:spcPts val="0"/>
+              </a:spcAft>
+              <a:buSzPts val="3100"/>
+              <a:buNone/>
+            </a:pPr>
+            <a:r>
+              <a:rPr lang="ru-RU" dirty="0"/>
+              <a:t>Рефлексия</a:t>
+            </a:r>
+            <a:endParaRPr dirty="0"/>
+          </a:p>
+        </p:txBody>
+      </p:sp>
+      <p:pic>
+        <p:nvPicPr>
+          <p:cNvPr id="486" name="Google Shape;486;p75"/>
+          <p:cNvPicPr preferRelativeResize="0"/>
+          <p:nvPr/>
+        </p:nvPicPr>
+        <p:blipFill rotWithShape="1">
+          <a:blip r:embed="rId3">
+            <a:alphaModFix/>
+          </a:blip>
+          <a:srcRect/>
+          <a:stretch/>
+        </p:blipFill>
+        <p:spPr>
+          <a:xfrm>
+            <a:off x="633114" y="2019850"/>
+            <a:ext cx="828522" cy="828504"/>
+          </a:xfrm>
+          <a:prstGeom prst="rect">
+            <a:avLst/>
+          </a:prstGeom>
+          <a:noFill/>
+          <a:ln>
+            <a:noFill/>
+          </a:ln>
+        </p:spPr>
+      </p:pic>
+      <p:sp>
+        <p:nvSpPr>
+          <p:cNvPr id="487" name="Google Shape;487;p75"/>
+          <p:cNvSpPr txBox="1"/>
+          <p:nvPr/>
+        </p:nvSpPr>
+        <p:spPr>
+          <a:xfrm>
+            <a:off x="1700240" y="2364004"/>
+            <a:ext cx="4672200" cy="415500"/>
+          </a:xfrm>
+          <a:prstGeom prst="rect">
+            <a:avLst/>
+          </a:prstGeom>
+          <a:noFill/>
+          <a:ln>
+            <a:noFill/>
+          </a:ln>
+        </p:spPr>
+        <p:txBody>
+          <a:bodyPr spcFirstLastPara="1" wrap="square" lIns="91425" tIns="91425" rIns="91425" bIns="91425" anchor="t" anchorCtr="0">
+            <a:spAutoFit/>
+          </a:bodyPr>
+          <a:lstStyle/>
+          <a:p>
+            <a:pPr marL="0" marR="0" lvl="0" indent="0" algn="l" rtl="0">
+              <a:lnSpc>
+                <a:spcPct val="100000"/>
+              </a:lnSpc>
+              <a:spcBef>
+                <a:spcPts val="0"/>
+              </a:spcBef>
+              <a:spcAft>
+                <a:spcPts val="0"/>
+              </a:spcAft>
+              <a:buClr>
+                <a:srgbClr val="000000"/>
+              </a:buClr>
+              <a:buSzPts val="1500"/>
+              <a:buFont typeface="Arial"/>
+              <a:buNone/>
+            </a:pPr>
+            <a:r>
+              <a:rPr lang="ru-RU" sz="1500" b="0" i="0" u="none" strike="noStrike" cap="none">
+                <a:solidFill>
+                  <a:schemeClr val="dk1"/>
+                </a:solidFill>
+                <a:latin typeface="Roboto"/>
+                <a:ea typeface="Roboto"/>
+                <a:cs typeface="Roboto"/>
+                <a:sym typeface="Roboto"/>
+              </a:rPr>
+              <a:t>С какими впечатлениями уходите с вебинара?</a:t>
+            </a:r>
+            <a:endParaRPr sz="1500" b="0" i="0" u="none" strike="noStrike" cap="none">
+              <a:solidFill>
+                <a:schemeClr val="dk1"/>
+              </a:solidFill>
+              <a:latin typeface="Roboto"/>
+              <a:ea typeface="Roboto"/>
+              <a:cs typeface="Roboto"/>
+              <a:sym typeface="Roboto"/>
+            </a:endParaRPr>
+          </a:p>
+        </p:txBody>
+      </p:sp>
+      <p:sp>
+        <p:nvSpPr>
+          <p:cNvPr id="488" name="Google Shape;488;p75"/>
+          <p:cNvSpPr txBox="1"/>
+          <p:nvPr/>
+        </p:nvSpPr>
+        <p:spPr>
+          <a:xfrm>
+            <a:off x="1700240" y="3414189"/>
+            <a:ext cx="4996800" cy="646500"/>
+          </a:xfrm>
+          <a:prstGeom prst="rect">
+            <a:avLst/>
+          </a:prstGeom>
+          <a:noFill/>
+          <a:ln>
+            <a:noFill/>
+          </a:ln>
+        </p:spPr>
+        <p:txBody>
+          <a:bodyPr spcFirstLastPara="1" wrap="square" lIns="91425" tIns="91425" rIns="91425" bIns="91425" anchor="t" anchorCtr="0">
+            <a:spAutoFit/>
+          </a:bodyPr>
+          <a:lstStyle/>
+          <a:p>
+            <a:pPr marL="0" marR="0" lvl="0" indent="0" algn="l" rtl="0">
+              <a:lnSpc>
+                <a:spcPct val="100000"/>
+              </a:lnSpc>
+              <a:spcBef>
+                <a:spcPts val="0"/>
+              </a:spcBef>
+              <a:spcAft>
+                <a:spcPts val="0"/>
+              </a:spcAft>
+              <a:buClr>
+                <a:srgbClr val="000000"/>
+              </a:buClr>
+              <a:buSzPts val="1500"/>
+              <a:buFont typeface="Arial"/>
+              <a:buNone/>
+            </a:pPr>
+            <a:r>
+              <a:rPr lang="ru-RU" sz="1500" b="0" i="0" u="none" strike="noStrike" cap="none">
+                <a:solidFill>
+                  <a:schemeClr val="dk1"/>
+                </a:solidFill>
+                <a:latin typeface="Roboto"/>
+                <a:ea typeface="Roboto"/>
+                <a:cs typeface="Roboto"/>
+                <a:sym typeface="Roboto"/>
+              </a:rPr>
+              <a:t>Как будете применять на практике то,</a:t>
+            </a:r>
+            <a:endParaRPr sz="1500" b="0" i="0" u="none" strike="noStrike" cap="none">
+              <a:solidFill>
+                <a:schemeClr val="dk1"/>
+              </a:solidFill>
+              <a:latin typeface="Roboto"/>
+              <a:ea typeface="Roboto"/>
+              <a:cs typeface="Roboto"/>
+              <a:sym typeface="Roboto"/>
+            </a:endParaRPr>
+          </a:p>
+          <a:p>
+            <a:pPr marL="0" marR="0" lvl="0" indent="0" algn="l" rtl="0">
+              <a:lnSpc>
+                <a:spcPct val="100000"/>
+              </a:lnSpc>
+              <a:spcBef>
+                <a:spcPts val="0"/>
+              </a:spcBef>
+              <a:spcAft>
+                <a:spcPts val="0"/>
+              </a:spcAft>
+              <a:buClr>
+                <a:srgbClr val="000000"/>
+              </a:buClr>
+              <a:buSzPts val="1500"/>
+              <a:buFont typeface="Arial"/>
+              <a:buNone/>
+            </a:pPr>
+            <a:r>
+              <a:rPr lang="ru-RU" sz="1500" b="0" i="0" u="none" strike="noStrike" cap="none">
+                <a:solidFill>
+                  <a:schemeClr val="dk1"/>
+                </a:solidFill>
+                <a:latin typeface="Roboto"/>
+                <a:ea typeface="Roboto"/>
+                <a:cs typeface="Roboto"/>
+                <a:sym typeface="Roboto"/>
+              </a:rPr>
+              <a:t>что узнали на вебинаре?</a:t>
+            </a:r>
+            <a:endParaRPr sz="1500" b="0" i="0" u="none" strike="noStrike" cap="none">
+              <a:solidFill>
+                <a:schemeClr val="dk1"/>
+              </a:solidFill>
+              <a:latin typeface="Roboto"/>
+              <a:ea typeface="Roboto"/>
+              <a:cs typeface="Roboto"/>
+              <a:sym typeface="Roboto"/>
+            </a:endParaRPr>
+          </a:p>
+        </p:txBody>
+      </p:sp>
+      <p:pic>
+        <p:nvPicPr>
+          <p:cNvPr id="489" name="Google Shape;489;p75"/>
+          <p:cNvPicPr preferRelativeResize="0"/>
+          <p:nvPr/>
+        </p:nvPicPr>
+        <p:blipFill rotWithShape="1">
+          <a:blip r:embed="rId4">
+            <a:alphaModFix/>
+          </a:blip>
+          <a:srcRect/>
+          <a:stretch/>
+        </p:blipFill>
+        <p:spPr>
+          <a:xfrm>
+            <a:off x="621950" y="3330152"/>
+            <a:ext cx="845250" cy="845249"/>
+          </a:xfrm>
+          <a:prstGeom prst="rect">
+            <a:avLst/>
+          </a:prstGeom>
+          <a:noFill/>
+          <a:ln>
+            <a:noFill/>
+          </a:ln>
+        </p:spPr>
+      </p:pic>
+    </p:spTree>
   </p:cSld>
   <p:clrMapOvr>
     <a:masterClrMapping/>
@@ -17954,307 +18136,6 @@
   <p:cSld>
     <p:spTree>
       <p:nvGrpSpPr>
-        <p:cNvPr id="1" name="Shape 484"/>
-        <p:cNvGrpSpPr/>
-        <p:nvPr/>
-      </p:nvGrpSpPr>
-      <p:grpSpPr>
-        <a:xfrm>
-          <a:off x="0" y="0"/>
-          <a:ext cx="0" cy="0"/>
-          <a:chOff x="0" y="0"/>
-          <a:chExt cx="0" cy="0"/>
-        </a:xfrm>
-      </p:grpSpPr>
-      <p:sp>
-        <p:nvSpPr>
-          <p:cNvPr id="485" name="Google Shape;485;p75"/>
-          <p:cNvSpPr txBox="1">
-            <a:spLocks noGrp="1"/>
-          </p:cNvSpPr>
-          <p:nvPr>
-            <p:ph type="title"/>
-          </p:nvPr>
-        </p:nvSpPr>
-        <p:spPr>
-          <a:xfrm>
-            <a:off x="500550" y="330724"/>
-            <a:ext cx="8520600" cy="1095900"/>
-          </a:xfrm>
-          <a:prstGeom prst="rect">
-            <a:avLst/>
-          </a:prstGeom>
-          <a:noFill/>
-          <a:ln>
-            <a:noFill/>
-          </a:ln>
-        </p:spPr>
-        <p:txBody>
-          <a:bodyPr spcFirstLastPara="1" wrap="square" lIns="91425" tIns="91425" rIns="91425" bIns="91425" anchor="t" anchorCtr="0">
-            <a:noAutofit/>
-          </a:bodyPr>
-          <a:lstStyle/>
-          <a:p>
-            <a:pPr marL="0" lvl="0" indent="0" algn="l" rtl="0">
-              <a:lnSpc>
-                <a:spcPct val="100000"/>
-              </a:lnSpc>
-              <a:spcBef>
-                <a:spcPts val="0"/>
-              </a:spcBef>
-              <a:spcAft>
-                <a:spcPts val="0"/>
-              </a:spcAft>
-              <a:buSzPts val="3100"/>
-              <a:buNone/>
-            </a:pPr>
-            <a:r>
-              <a:rPr lang="ru-RU" dirty="0"/>
-              <a:t>Рефлексия</a:t>
-            </a:r>
-            <a:endParaRPr dirty="0"/>
-          </a:p>
-        </p:txBody>
-      </p:sp>
-      <p:pic>
-        <p:nvPicPr>
-          <p:cNvPr id="486" name="Google Shape;486;p75"/>
-          <p:cNvPicPr preferRelativeResize="0"/>
-          <p:nvPr/>
-        </p:nvPicPr>
-        <p:blipFill rotWithShape="1">
-          <a:blip r:embed="rId3">
-            <a:alphaModFix/>
-          </a:blip>
-          <a:srcRect/>
-          <a:stretch/>
-        </p:blipFill>
-        <p:spPr>
-          <a:xfrm>
-            <a:off x="633114" y="2019850"/>
-            <a:ext cx="828522" cy="828504"/>
-          </a:xfrm>
-          <a:prstGeom prst="rect">
-            <a:avLst/>
-          </a:prstGeom>
-          <a:noFill/>
-          <a:ln>
-            <a:noFill/>
-          </a:ln>
-        </p:spPr>
-      </p:pic>
-      <p:sp>
-        <p:nvSpPr>
-          <p:cNvPr id="487" name="Google Shape;487;p75"/>
-          <p:cNvSpPr txBox="1"/>
-          <p:nvPr/>
-        </p:nvSpPr>
-        <p:spPr>
-          <a:xfrm>
-            <a:off x="1700240" y="2364004"/>
-            <a:ext cx="4672200" cy="415500"/>
-          </a:xfrm>
-          <a:prstGeom prst="rect">
-            <a:avLst/>
-          </a:prstGeom>
-          <a:noFill/>
-          <a:ln>
-            <a:noFill/>
-          </a:ln>
-        </p:spPr>
-        <p:txBody>
-          <a:bodyPr spcFirstLastPara="1" wrap="square" lIns="91425" tIns="91425" rIns="91425" bIns="91425" anchor="t" anchorCtr="0">
-            <a:spAutoFit/>
-          </a:bodyPr>
-          <a:lstStyle/>
-          <a:p>
-            <a:pPr marL="0" marR="0" lvl="0" indent="0" algn="l" rtl="0">
-              <a:lnSpc>
-                <a:spcPct val="100000"/>
-              </a:lnSpc>
-              <a:spcBef>
-                <a:spcPts val="0"/>
-              </a:spcBef>
-              <a:spcAft>
-                <a:spcPts val="0"/>
-              </a:spcAft>
-              <a:buClr>
-                <a:srgbClr val="000000"/>
-              </a:buClr>
-              <a:buSzPts val="1500"/>
-              <a:buFont typeface="Arial"/>
-              <a:buNone/>
-            </a:pPr>
-            <a:r>
-              <a:rPr lang="ru-RU" sz="1500" b="0" i="0" u="none" strike="noStrike" cap="none">
-                <a:solidFill>
-                  <a:schemeClr val="dk1"/>
-                </a:solidFill>
-                <a:latin typeface="Roboto"/>
-                <a:ea typeface="Roboto"/>
-                <a:cs typeface="Roboto"/>
-                <a:sym typeface="Roboto"/>
-              </a:rPr>
-              <a:t>С какими впечатлениями уходите с вебинара?</a:t>
-            </a:r>
-            <a:endParaRPr sz="1500" b="0" i="0" u="none" strike="noStrike" cap="none">
-              <a:solidFill>
-                <a:schemeClr val="dk1"/>
-              </a:solidFill>
-              <a:latin typeface="Roboto"/>
-              <a:ea typeface="Roboto"/>
-              <a:cs typeface="Roboto"/>
-              <a:sym typeface="Roboto"/>
-            </a:endParaRPr>
-          </a:p>
-        </p:txBody>
-      </p:sp>
-      <p:sp>
-        <p:nvSpPr>
-          <p:cNvPr id="488" name="Google Shape;488;p75"/>
-          <p:cNvSpPr txBox="1"/>
-          <p:nvPr/>
-        </p:nvSpPr>
-        <p:spPr>
-          <a:xfrm>
-            <a:off x="1700240" y="3414189"/>
-            <a:ext cx="4996800" cy="646500"/>
-          </a:xfrm>
-          <a:prstGeom prst="rect">
-            <a:avLst/>
-          </a:prstGeom>
-          <a:noFill/>
-          <a:ln>
-            <a:noFill/>
-          </a:ln>
-        </p:spPr>
-        <p:txBody>
-          <a:bodyPr spcFirstLastPara="1" wrap="square" lIns="91425" tIns="91425" rIns="91425" bIns="91425" anchor="t" anchorCtr="0">
-            <a:spAutoFit/>
-          </a:bodyPr>
-          <a:lstStyle/>
-          <a:p>
-            <a:pPr marL="0" marR="0" lvl="0" indent="0" algn="l" rtl="0">
-              <a:lnSpc>
-                <a:spcPct val="100000"/>
-              </a:lnSpc>
-              <a:spcBef>
-                <a:spcPts val="0"/>
-              </a:spcBef>
-              <a:spcAft>
-                <a:spcPts val="0"/>
-              </a:spcAft>
-              <a:buClr>
-                <a:srgbClr val="000000"/>
-              </a:buClr>
-              <a:buSzPts val="1500"/>
-              <a:buFont typeface="Arial"/>
-              <a:buNone/>
-            </a:pPr>
-            <a:r>
-              <a:rPr lang="ru-RU" sz="1500" b="0" i="0" u="none" strike="noStrike" cap="none">
-                <a:solidFill>
-                  <a:schemeClr val="dk1"/>
-                </a:solidFill>
-                <a:latin typeface="Roboto"/>
-                <a:ea typeface="Roboto"/>
-                <a:cs typeface="Roboto"/>
-                <a:sym typeface="Roboto"/>
-              </a:rPr>
-              <a:t>Как будете применять на практике то,</a:t>
-            </a:r>
-            <a:endParaRPr sz="1500" b="0" i="0" u="none" strike="noStrike" cap="none">
-              <a:solidFill>
-                <a:schemeClr val="dk1"/>
-              </a:solidFill>
-              <a:latin typeface="Roboto"/>
-              <a:ea typeface="Roboto"/>
-              <a:cs typeface="Roboto"/>
-              <a:sym typeface="Roboto"/>
-            </a:endParaRPr>
-          </a:p>
-          <a:p>
-            <a:pPr marL="0" marR="0" lvl="0" indent="0" algn="l" rtl="0">
-              <a:lnSpc>
-                <a:spcPct val="100000"/>
-              </a:lnSpc>
-              <a:spcBef>
-                <a:spcPts val="0"/>
-              </a:spcBef>
-              <a:spcAft>
-                <a:spcPts val="0"/>
-              </a:spcAft>
-              <a:buClr>
-                <a:srgbClr val="000000"/>
-              </a:buClr>
-              <a:buSzPts val="1500"/>
-              <a:buFont typeface="Arial"/>
-              <a:buNone/>
-            </a:pPr>
-            <a:r>
-              <a:rPr lang="ru-RU" sz="1500" b="0" i="0" u="none" strike="noStrike" cap="none">
-                <a:solidFill>
-                  <a:schemeClr val="dk1"/>
-                </a:solidFill>
-                <a:latin typeface="Roboto"/>
-                <a:ea typeface="Roboto"/>
-                <a:cs typeface="Roboto"/>
-                <a:sym typeface="Roboto"/>
-              </a:rPr>
-              <a:t>что узнали на вебинаре?</a:t>
-            </a:r>
-            <a:endParaRPr sz="1500" b="0" i="0" u="none" strike="noStrike" cap="none">
-              <a:solidFill>
-                <a:schemeClr val="dk1"/>
-              </a:solidFill>
-              <a:latin typeface="Roboto"/>
-              <a:ea typeface="Roboto"/>
-              <a:cs typeface="Roboto"/>
-              <a:sym typeface="Roboto"/>
-            </a:endParaRPr>
-          </a:p>
-        </p:txBody>
-      </p:sp>
-      <p:pic>
-        <p:nvPicPr>
-          <p:cNvPr id="489" name="Google Shape;489;p75"/>
-          <p:cNvPicPr preferRelativeResize="0"/>
-          <p:nvPr/>
-        </p:nvPicPr>
-        <p:blipFill rotWithShape="1">
-          <a:blip r:embed="rId4">
-            <a:alphaModFix/>
-          </a:blip>
-          <a:srcRect/>
-          <a:stretch/>
-        </p:blipFill>
-        <p:spPr>
-          <a:xfrm>
-            <a:off x="621950" y="3330152"/>
-            <a:ext cx="845250" cy="845249"/>
-          </a:xfrm>
-          <a:prstGeom prst="rect">
-            <a:avLst/>
-          </a:prstGeom>
-          <a:noFill/>
-          <a:ln>
-            <a:noFill/>
-          </a:ln>
-        </p:spPr>
-      </p:pic>
-    </p:spTree>
-  </p:cSld>
-  <p:clrMapOvr>
-    <a:masterClrMapping/>
-  </p:clrMapOvr>
-</p:sld>
-</file>
-
-<file path=ppt/slides/slide41.xml><?xml version="1.0" encoding="utf-8"?>
-<p:sld xmlns:a="http://schemas.openxmlformats.org/drawingml/2006/main" xmlns:r="http://schemas.openxmlformats.org/officeDocument/2006/relationships" xmlns:p="http://schemas.openxmlformats.org/presentationml/2006/main">
-  <p:cSld>
-    <p:spTree>
-      <p:nvGrpSpPr>
         <p:cNvPr id="1" name="Shape 493"/>
         <p:cNvGrpSpPr/>
         <p:nvPr/>
@@ -18369,7 +18250,7 @@
 </p:sld>
 </file>
 
-<file path=ppt/slides/slide42.xml><?xml version="1.0" encoding="utf-8"?>
+<file path=ppt/slides/slide41.xml><?xml version="1.0" encoding="utf-8"?>
 <p:sld xmlns:a="http://schemas.openxmlformats.org/drawingml/2006/main" xmlns:r="http://schemas.openxmlformats.org/officeDocument/2006/relationships" xmlns:p="http://schemas.openxmlformats.org/presentationml/2006/main">
   <p:cSld>
     <p:spTree>
